--- a/기획안/몬스터 애니메이션.pptx
+++ b/기획안/몬스터 애니메이션.pptx
@@ -9,9 +9,12 @@
     <p:sldId id="257" r:id="rId3"/>
     <p:sldId id="258" r:id="rId4"/>
     <p:sldId id="259" r:id="rId5"/>
-    <p:sldId id="260" r:id="rId6"/>
-    <p:sldId id="261" r:id="rId7"/>
-    <p:sldId id="262" r:id="rId8"/>
+    <p:sldId id="263" r:id="rId6"/>
+    <p:sldId id="264" r:id="rId7"/>
+    <p:sldId id="265" r:id="rId8"/>
+    <p:sldId id="260" r:id="rId9"/>
+    <p:sldId id="261" r:id="rId10"/>
+    <p:sldId id="262" r:id="rId11"/>
   </p:sldIdLst>
   <p:sldSz cx="12192000" cy="6858000"/>
   <p:notesSz cx="6858000" cy="9144000"/>
@@ -110,6 +113,11 @@
       </a:defRPr>
     </a:lvl9pPr>
   </p:defaultTextStyle>
+  <p:extLst>
+    <p:ext uri="{EFAFB233-063F-42B5-8137-9DF3F51BA10A}">
+      <p15:sldGuideLst xmlns:p15="http://schemas.microsoft.com/office/powerpoint/2012/main"/>
+    </p:ext>
+  </p:extLst>
 </p:presentation>
 </file>
 
@@ -260,7 +268,7 @@
           <a:p>
             <a:fld id="{6B56BC1F-4298-4300-A51F-0ACDF791CB8C}" type="datetimeFigureOut">
               <a:rPr lang="ko-KR" altLang="en-US" smtClean="0"/>
-              <a:t>2026-09-04</a:t>
+              <a:t>2026-09-22</a:t>
             </a:fld>
             <a:endParaRPr lang="ko-KR" altLang="en-US"/>
           </a:p>
@@ -458,7 +466,7 @@
           <a:p>
             <a:fld id="{6B56BC1F-4298-4300-A51F-0ACDF791CB8C}" type="datetimeFigureOut">
               <a:rPr lang="ko-KR" altLang="en-US" smtClean="0"/>
-              <a:t>2026-09-04</a:t>
+              <a:t>2026-09-22</a:t>
             </a:fld>
             <a:endParaRPr lang="ko-KR" altLang="en-US"/>
           </a:p>
@@ -666,7 +674,7 @@
           <a:p>
             <a:fld id="{6B56BC1F-4298-4300-A51F-0ACDF791CB8C}" type="datetimeFigureOut">
               <a:rPr lang="ko-KR" altLang="en-US" smtClean="0"/>
-              <a:t>2026-09-04</a:t>
+              <a:t>2026-09-22</a:t>
             </a:fld>
             <a:endParaRPr lang="ko-KR" altLang="en-US"/>
           </a:p>
@@ -864,7 +872,7 @@
           <a:p>
             <a:fld id="{6B56BC1F-4298-4300-A51F-0ACDF791CB8C}" type="datetimeFigureOut">
               <a:rPr lang="ko-KR" altLang="en-US" smtClean="0"/>
-              <a:t>2026-09-04</a:t>
+              <a:t>2026-09-22</a:t>
             </a:fld>
             <a:endParaRPr lang="ko-KR" altLang="en-US"/>
           </a:p>
@@ -1139,7 +1147,7 @@
           <a:p>
             <a:fld id="{6B56BC1F-4298-4300-A51F-0ACDF791CB8C}" type="datetimeFigureOut">
               <a:rPr lang="ko-KR" altLang="en-US" smtClean="0"/>
-              <a:t>2026-09-04</a:t>
+              <a:t>2026-09-22</a:t>
             </a:fld>
             <a:endParaRPr lang="ko-KR" altLang="en-US"/>
           </a:p>
@@ -1404,7 +1412,7 @@
           <a:p>
             <a:fld id="{6B56BC1F-4298-4300-A51F-0ACDF791CB8C}" type="datetimeFigureOut">
               <a:rPr lang="ko-KR" altLang="en-US" smtClean="0"/>
-              <a:t>2026-09-04</a:t>
+              <a:t>2026-09-22</a:t>
             </a:fld>
             <a:endParaRPr lang="ko-KR" altLang="en-US"/>
           </a:p>
@@ -1816,7 +1824,7 @@
           <a:p>
             <a:fld id="{6B56BC1F-4298-4300-A51F-0ACDF791CB8C}" type="datetimeFigureOut">
               <a:rPr lang="ko-KR" altLang="en-US" smtClean="0"/>
-              <a:t>2026-09-04</a:t>
+              <a:t>2026-09-22</a:t>
             </a:fld>
             <a:endParaRPr lang="ko-KR" altLang="en-US"/>
           </a:p>
@@ -1957,7 +1965,7 @@
           <a:p>
             <a:fld id="{6B56BC1F-4298-4300-A51F-0ACDF791CB8C}" type="datetimeFigureOut">
               <a:rPr lang="ko-KR" altLang="en-US" smtClean="0"/>
-              <a:t>2026-09-04</a:t>
+              <a:t>2026-09-22</a:t>
             </a:fld>
             <a:endParaRPr lang="ko-KR" altLang="en-US"/>
           </a:p>
@@ -2070,7 +2078,7 @@
           <a:p>
             <a:fld id="{6B56BC1F-4298-4300-A51F-0ACDF791CB8C}" type="datetimeFigureOut">
               <a:rPr lang="ko-KR" altLang="en-US" smtClean="0"/>
-              <a:t>2026-09-04</a:t>
+              <a:t>2026-09-22</a:t>
             </a:fld>
             <a:endParaRPr lang="ko-KR" altLang="en-US"/>
           </a:p>
@@ -2381,7 +2389,7 @@
           <a:p>
             <a:fld id="{6B56BC1F-4298-4300-A51F-0ACDF791CB8C}" type="datetimeFigureOut">
               <a:rPr lang="ko-KR" altLang="en-US" smtClean="0"/>
-              <a:t>2026-09-04</a:t>
+              <a:t>2026-09-22</a:t>
             </a:fld>
             <a:endParaRPr lang="ko-KR" altLang="en-US"/>
           </a:p>
@@ -2669,7 +2677,7 @@
           <a:p>
             <a:fld id="{6B56BC1F-4298-4300-A51F-0ACDF791CB8C}" type="datetimeFigureOut">
               <a:rPr lang="ko-KR" altLang="en-US" smtClean="0"/>
-              <a:t>2026-09-04</a:t>
+              <a:t>2026-09-22</a:t>
             </a:fld>
             <a:endParaRPr lang="ko-KR" altLang="en-US"/>
           </a:p>
@@ -2919,7 +2927,7 @@
           <a:p>
             <a:fld id="{6B56BC1F-4298-4300-A51F-0ACDF791CB8C}" type="datetimeFigureOut">
               <a:rPr lang="ko-KR" altLang="en-US" smtClean="0"/>
-              <a:t>2026-09-04</a:t>
+              <a:t>2026-09-22</a:t>
             </a:fld>
             <a:endParaRPr lang="ko-KR" altLang="en-US"/>
           </a:p>
@@ -3791,6 +3799,42 @@
 </p:sld>
 </file>
 
+<file path=ppt/slides/slide10.xml><?xml version="1.0" encoding="utf-8"?>
+<p:sld xmlns:a="http://schemas.openxmlformats.org/drawingml/2006/main" xmlns:r="http://schemas.openxmlformats.org/officeDocument/2006/relationships" xmlns:p="http://schemas.openxmlformats.org/presentationml/2006/main">
+  <p:cSld>
+    <p:spTree>
+      <p:nvGrpSpPr>
+        <p:cNvPr id="1" name="">
+          <a:extLst>
+            <a:ext uri="{FF2B5EF4-FFF2-40B4-BE49-F238E27FC236}">
+              <a16:creationId xmlns:a16="http://schemas.microsoft.com/office/drawing/2014/main" id="{7B27190B-74E5-2EE0-3313-ADB70782C69C}"/>
+            </a:ext>
+          </a:extLst>
+        </p:cNvPr>
+        <p:cNvGrpSpPr/>
+        <p:nvPr/>
+      </p:nvGrpSpPr>
+      <p:grpSpPr>
+        <a:xfrm>
+          <a:off x="0" y="0"/>
+          <a:ext cx="0" cy="0"/>
+          <a:chOff x="0" y="0"/>
+          <a:chExt cx="0" cy="0"/>
+        </a:xfrm>
+      </p:grpSpPr>
+    </p:spTree>
+    <p:extLst>
+      <p:ext uri="{BB962C8B-B14F-4D97-AF65-F5344CB8AC3E}">
+        <p14:creationId xmlns:p14="http://schemas.microsoft.com/office/powerpoint/2010/main" val="291063068"/>
+      </p:ext>
+    </p:extLst>
+  </p:cSld>
+  <p:clrMapOvr>
+    <a:masterClrMapping/>
+  </p:clrMapOvr>
+</p:sld>
+</file>
+
 <file path=ppt/slides/slide2.xml><?xml version="1.0" encoding="utf-8"?>
 <p:sld xmlns:a="http://schemas.openxmlformats.org/drawingml/2006/main" xmlns:r="http://schemas.openxmlformats.org/officeDocument/2006/relationships" xmlns:p="http://schemas.openxmlformats.org/presentationml/2006/main">
   <p:cSld>
@@ -5278,7 +5322,7 @@
           <p:nvPr>
             <p:extLst>
               <p:ext uri="{D42A27DB-BD31-4B8C-83A1-F6EECF244321}">
-                <p14:modId xmlns:p14="http://schemas.microsoft.com/office/powerpoint/2010/main" val="2789862984"/>
+                <p14:modId xmlns:p14="http://schemas.microsoft.com/office/powerpoint/2010/main" val="2342742876"/>
               </p:ext>
             </p:extLst>
           </p:nvPr>
@@ -5294,14 +5338,14 @@
                 <a:tableStyleId>{5940675A-B579-460E-94D1-54222C63F5DA}</a:tableStyleId>
               </a:tblPr>
               <a:tblGrid>
-                <a:gridCol w="1417700">
+                <a:gridCol w="1421164">
                   <a:extLst>
                     <a:ext uri="{9D8B030D-6E8A-4147-A177-3AD203B41FA5}">
                       <a16:colId xmlns:a16="http://schemas.microsoft.com/office/drawing/2014/main" val="3234171030"/>
                     </a:ext>
                   </a:extLst>
                 </a:gridCol>
-                <a:gridCol w="1857375">
+                <a:gridCol w="1853911">
                   <a:extLst>
                     <a:ext uri="{9D8B030D-6E8A-4147-A177-3AD203B41FA5}">
                       <a16:colId xmlns:a16="http://schemas.microsoft.com/office/drawing/2014/main" val="356375298"/>
@@ -6066,6 +6110,606 @@
           <a:chExt cx="0" cy="0"/>
         </a:xfrm>
       </p:grpSpPr>
+      <p:pic>
+        <p:nvPicPr>
+          <p:cNvPr id="3" name="그림 2">
+            <a:extLst>
+              <a:ext uri="{FF2B5EF4-FFF2-40B4-BE49-F238E27FC236}">
+                <a16:creationId xmlns:a16="http://schemas.microsoft.com/office/drawing/2014/main" id="{208A09AB-F1E5-23A0-12E1-C8B81A646BAE}"/>
+              </a:ext>
+            </a:extLst>
+          </p:cNvPr>
+          <p:cNvPicPr>
+            <a:picLocks noChangeAspect="1"/>
+          </p:cNvPicPr>
+          <p:nvPr/>
+        </p:nvPicPr>
+        <p:blipFill>
+          <a:blip r:embed="rId2">
+            <a:extLst>
+              <a:ext uri="{28A0092B-C50C-407E-A947-70E740481C1C}">
+                <a14:useLocalDpi xmlns:a14="http://schemas.microsoft.com/office/drawing/2010/main" val="0"/>
+              </a:ext>
+            </a:extLst>
+          </a:blip>
+          <a:stretch>
+            <a:fillRect/>
+          </a:stretch>
+        </p:blipFill>
+        <p:spPr>
+          <a:xfrm flipH="1">
+            <a:off x="8093962" y="1343196"/>
+            <a:ext cx="5642110" cy="4765531"/>
+          </a:xfrm>
+          <a:prstGeom prst="rect">
+            <a:avLst/>
+          </a:prstGeom>
+        </p:spPr>
+      </p:pic>
+      <p:sp>
+        <p:nvSpPr>
+          <p:cNvPr id="13" name="직사각형 12">
+            <a:extLst>
+              <a:ext uri="{FF2B5EF4-FFF2-40B4-BE49-F238E27FC236}">
+                <a16:creationId xmlns:a16="http://schemas.microsoft.com/office/drawing/2014/main" id="{D386E3B0-3ED7-3092-3ADB-FC02F5083B62}"/>
+              </a:ext>
+            </a:extLst>
+          </p:cNvPr>
+          <p:cNvSpPr/>
+          <p:nvPr/>
+        </p:nvSpPr>
+        <p:spPr>
+          <a:xfrm>
+            <a:off x="0" y="5966690"/>
+            <a:ext cx="12192000" cy="891310"/>
+          </a:xfrm>
+          <a:prstGeom prst="rect">
+            <a:avLst/>
+          </a:prstGeom>
+        </p:spPr>
+        <p:style>
+          <a:lnRef idx="2">
+            <a:schemeClr val="accent1">
+              <a:shade val="15000"/>
+            </a:schemeClr>
+          </a:lnRef>
+          <a:fillRef idx="1">
+            <a:schemeClr val="accent1"/>
+          </a:fillRef>
+          <a:effectRef idx="0">
+            <a:schemeClr val="accent1"/>
+          </a:effectRef>
+          <a:fontRef idx="minor">
+            <a:schemeClr val="lt1"/>
+          </a:fontRef>
+        </p:style>
+        <p:txBody>
+          <a:bodyPr rtlCol="0" anchor="ctr"/>
+          <a:lstStyle/>
+          <a:p>
+            <a:pPr algn="ctr"/>
+            <a:endParaRPr lang="ko-KR" altLang="en-US"/>
+          </a:p>
+        </p:txBody>
+      </p:sp>
+      <p:sp>
+        <p:nvSpPr>
+          <p:cNvPr id="14" name="직사각형 13">
+            <a:extLst>
+              <a:ext uri="{FF2B5EF4-FFF2-40B4-BE49-F238E27FC236}">
+                <a16:creationId xmlns:a16="http://schemas.microsoft.com/office/drawing/2014/main" id="{CF075ACC-E93B-18D6-0ED2-9874DAD77D37}"/>
+              </a:ext>
+            </a:extLst>
+          </p:cNvPr>
+          <p:cNvSpPr/>
+          <p:nvPr/>
+        </p:nvSpPr>
+        <p:spPr>
+          <a:xfrm>
+            <a:off x="318952" y="4895272"/>
+            <a:ext cx="1699491" cy="461818"/>
+          </a:xfrm>
+          <a:prstGeom prst="rect">
+            <a:avLst/>
+          </a:prstGeom>
+        </p:spPr>
+        <p:style>
+          <a:lnRef idx="2">
+            <a:schemeClr val="accent1">
+              <a:shade val="15000"/>
+            </a:schemeClr>
+          </a:lnRef>
+          <a:fillRef idx="1">
+            <a:schemeClr val="accent1"/>
+          </a:fillRef>
+          <a:effectRef idx="0">
+            <a:schemeClr val="accent1"/>
+          </a:effectRef>
+          <a:fontRef idx="minor">
+            <a:schemeClr val="lt1"/>
+          </a:fontRef>
+        </p:style>
+        <p:txBody>
+          <a:bodyPr rtlCol="0" anchor="ctr"/>
+          <a:lstStyle/>
+          <a:p>
+            <a:pPr algn="ctr"/>
+            <a:endParaRPr lang="ko-KR" altLang="en-US"/>
+          </a:p>
+        </p:txBody>
+      </p:sp>
+      <p:sp>
+        <p:nvSpPr>
+          <p:cNvPr id="15" name="직사각형 14">
+            <a:extLst>
+              <a:ext uri="{FF2B5EF4-FFF2-40B4-BE49-F238E27FC236}">
+                <a16:creationId xmlns:a16="http://schemas.microsoft.com/office/drawing/2014/main" id="{4A4F1D86-6CCA-BD79-E040-DC2F995AB5F7}"/>
+              </a:ext>
+            </a:extLst>
+          </p:cNvPr>
+          <p:cNvSpPr/>
+          <p:nvPr/>
+        </p:nvSpPr>
+        <p:spPr>
+          <a:xfrm>
+            <a:off x="2207491" y="3098801"/>
+            <a:ext cx="1662545" cy="461818"/>
+          </a:xfrm>
+          <a:prstGeom prst="rect">
+            <a:avLst/>
+          </a:prstGeom>
+        </p:spPr>
+        <p:style>
+          <a:lnRef idx="2">
+            <a:schemeClr val="accent1">
+              <a:shade val="15000"/>
+            </a:schemeClr>
+          </a:lnRef>
+          <a:fillRef idx="1">
+            <a:schemeClr val="accent1"/>
+          </a:fillRef>
+          <a:effectRef idx="0">
+            <a:schemeClr val="accent1"/>
+          </a:effectRef>
+          <a:fontRef idx="minor">
+            <a:schemeClr val="lt1"/>
+          </a:fontRef>
+        </p:style>
+        <p:txBody>
+          <a:bodyPr rtlCol="0" anchor="ctr"/>
+          <a:lstStyle/>
+          <a:p>
+            <a:pPr algn="ctr"/>
+            <a:endParaRPr lang="ko-KR" altLang="en-US"/>
+          </a:p>
+        </p:txBody>
+      </p:sp>
+      <p:sp>
+        <p:nvSpPr>
+          <p:cNvPr id="16" name="직사각형 15">
+            <a:extLst>
+              <a:ext uri="{FF2B5EF4-FFF2-40B4-BE49-F238E27FC236}">
+                <a16:creationId xmlns:a16="http://schemas.microsoft.com/office/drawing/2014/main" id="{D726A225-E234-428F-6BC6-9A609F27C4AD}"/>
+              </a:ext>
+            </a:extLst>
+          </p:cNvPr>
+          <p:cNvSpPr/>
+          <p:nvPr/>
+        </p:nvSpPr>
+        <p:spPr>
+          <a:xfrm>
+            <a:off x="4010217" y="1500910"/>
+            <a:ext cx="1550073" cy="461818"/>
+          </a:xfrm>
+          <a:prstGeom prst="rect">
+            <a:avLst/>
+          </a:prstGeom>
+        </p:spPr>
+        <p:style>
+          <a:lnRef idx="2">
+            <a:schemeClr val="accent1">
+              <a:shade val="15000"/>
+            </a:schemeClr>
+          </a:lnRef>
+          <a:fillRef idx="1">
+            <a:schemeClr val="accent1"/>
+          </a:fillRef>
+          <a:effectRef idx="0">
+            <a:schemeClr val="accent1"/>
+          </a:effectRef>
+          <a:fontRef idx="minor">
+            <a:schemeClr val="lt1"/>
+          </a:fontRef>
+        </p:style>
+        <p:txBody>
+          <a:bodyPr rtlCol="0" anchor="ctr"/>
+          <a:lstStyle/>
+          <a:p>
+            <a:pPr algn="ctr"/>
+            <a:endParaRPr lang="ko-KR" altLang="en-US"/>
+          </a:p>
+        </p:txBody>
+      </p:sp>
+      <p:pic>
+        <p:nvPicPr>
+          <p:cNvPr id="19" name="그림 18">
+            <a:extLst>
+              <a:ext uri="{FF2B5EF4-FFF2-40B4-BE49-F238E27FC236}">
+                <a16:creationId xmlns:a16="http://schemas.microsoft.com/office/drawing/2014/main" id="{60D7FBC9-279B-C224-0917-4867ADB75272}"/>
+              </a:ext>
+            </a:extLst>
+          </p:cNvPr>
+          <p:cNvPicPr>
+            <a:picLocks noChangeAspect="1"/>
+          </p:cNvPicPr>
+          <p:nvPr/>
+        </p:nvPicPr>
+        <p:blipFill>
+          <a:blip r:embed="rId3">
+            <a:extLst>
+              <a:ext uri="{28A0092B-C50C-407E-A947-70E740481C1C}">
+                <a14:useLocalDpi xmlns:a14="http://schemas.microsoft.com/office/drawing/2010/main" val="0"/>
+              </a:ext>
+            </a:extLst>
+          </a:blip>
+          <a:srcRect t="24559" b="22945"/>
+          <a:stretch>
+            <a:fillRect/>
+          </a:stretch>
+        </p:blipFill>
+        <p:spPr>
+          <a:xfrm rot="5400000">
+            <a:off x="121525" y="3807328"/>
+            <a:ext cx="1570658" cy="797376"/>
+          </a:xfrm>
+          <a:prstGeom prst="rect">
+            <a:avLst/>
+          </a:prstGeom>
+        </p:spPr>
+      </p:pic>
+      <p:pic>
+        <p:nvPicPr>
+          <p:cNvPr id="20" name="그림 19">
+            <a:extLst>
+              <a:ext uri="{FF2B5EF4-FFF2-40B4-BE49-F238E27FC236}">
+                <a16:creationId xmlns:a16="http://schemas.microsoft.com/office/drawing/2014/main" id="{2B99D24B-44B0-835D-2EC6-24B2B34E78A7}"/>
+              </a:ext>
+            </a:extLst>
+          </p:cNvPr>
+          <p:cNvPicPr>
+            <a:picLocks noChangeAspect="1"/>
+          </p:cNvPicPr>
+          <p:nvPr/>
+        </p:nvPicPr>
+        <p:blipFill>
+          <a:blip r:embed="rId3">
+            <a:extLst>
+              <a:ext uri="{28A0092B-C50C-407E-A947-70E740481C1C}">
+                <a14:useLocalDpi xmlns:a14="http://schemas.microsoft.com/office/drawing/2010/main" val="0"/>
+              </a:ext>
+            </a:extLst>
+          </a:blip>
+          <a:srcRect t="24559" b="22945"/>
+          <a:stretch>
+            <a:fillRect/>
+          </a:stretch>
+        </p:blipFill>
+        <p:spPr>
+          <a:xfrm rot="5400000">
+            <a:off x="2168952" y="2906726"/>
+            <a:ext cx="2024781" cy="1027921"/>
+          </a:xfrm>
+          <a:prstGeom prst="rect">
+            <a:avLst/>
+          </a:prstGeom>
+        </p:spPr>
+      </p:pic>
+      <p:pic>
+        <p:nvPicPr>
+          <p:cNvPr id="21" name="그림 20">
+            <a:extLst>
+              <a:ext uri="{FF2B5EF4-FFF2-40B4-BE49-F238E27FC236}">
+                <a16:creationId xmlns:a16="http://schemas.microsoft.com/office/drawing/2014/main" id="{260E2C2F-E9DC-6C3B-6564-A3FCE6FE5790}"/>
+              </a:ext>
+            </a:extLst>
+          </p:cNvPr>
+          <p:cNvPicPr>
+            <a:picLocks noChangeAspect="1"/>
+          </p:cNvPicPr>
+          <p:nvPr/>
+        </p:nvPicPr>
+        <p:blipFill>
+          <a:blip r:embed="rId3">
+            <a:extLst>
+              <a:ext uri="{28A0092B-C50C-407E-A947-70E740481C1C}">
+                <a14:useLocalDpi xmlns:a14="http://schemas.microsoft.com/office/drawing/2010/main" val="0"/>
+              </a:ext>
+            </a:extLst>
+          </a:blip>
+          <a:srcRect t="24559" b="22945"/>
+          <a:stretch>
+            <a:fillRect/>
+          </a:stretch>
+        </p:blipFill>
+        <p:spPr>
+          <a:xfrm rot="5400000">
+            <a:off x="4109126" y="572242"/>
+            <a:ext cx="2243741" cy="1139081"/>
+          </a:xfrm>
+          <a:prstGeom prst="rect">
+            <a:avLst/>
+          </a:prstGeom>
+        </p:spPr>
+      </p:pic>
+      <p:graphicFrame>
+        <p:nvGraphicFramePr>
+          <p:cNvPr id="22" name="표 21">
+            <a:extLst>
+              <a:ext uri="{FF2B5EF4-FFF2-40B4-BE49-F238E27FC236}">
+                <a16:creationId xmlns:a16="http://schemas.microsoft.com/office/drawing/2014/main" id="{D8AE68B3-46D7-964C-8BEF-91F7EC5226A9}"/>
+              </a:ext>
+            </a:extLst>
+          </p:cNvPr>
+          <p:cNvGraphicFramePr>
+            <a:graphicFrameLocks noGrp="1"/>
+          </p:cNvGraphicFramePr>
+          <p:nvPr>
+            <p:extLst>
+              <p:ext uri="{D42A27DB-BD31-4B8C-83A1-F6EECF244321}">
+                <p14:modId xmlns:p14="http://schemas.microsoft.com/office/powerpoint/2010/main" val="146197721"/>
+              </p:ext>
+            </p:extLst>
+          </p:nvPr>
+        </p:nvGraphicFramePr>
+        <p:xfrm>
+          <a:off x="5057144" y="3889432"/>
+          <a:ext cx="4342360" cy="2377440"/>
+        </p:xfrm>
+        <a:graphic>
+          <a:graphicData uri="http://schemas.openxmlformats.org/drawingml/2006/table">
+            <a:tbl>
+              <a:tblPr firstRow="1" bandRow="1">
+                <a:tableStyleId>{5940675A-B579-460E-94D1-54222C63F5DA}</a:tableStyleId>
+              </a:tblPr>
+              <a:tblGrid>
+                <a:gridCol w="1884294">
+                  <a:extLst>
+                    <a:ext uri="{9D8B030D-6E8A-4147-A177-3AD203B41FA5}">
+                      <a16:colId xmlns:a16="http://schemas.microsoft.com/office/drawing/2014/main" val="3234171030"/>
+                    </a:ext>
+                  </a:extLst>
+                </a:gridCol>
+                <a:gridCol w="2458066">
+                  <a:extLst>
+                    <a:ext uri="{9D8B030D-6E8A-4147-A177-3AD203B41FA5}">
+                      <a16:colId xmlns:a16="http://schemas.microsoft.com/office/drawing/2014/main" val="356375298"/>
+                    </a:ext>
+                  </a:extLst>
+                </a:gridCol>
+              </a:tblGrid>
+              <a:tr h="300714">
+                <a:tc>
+                  <a:txBody>
+                    <a:bodyPr/>
+                    <a:lstStyle/>
+                    <a:p>
+                      <a:pPr algn="ctr" latinLnBrk="1"/>
+                      <a:r>
+                        <a:rPr lang="ko-KR" altLang="en-US" dirty="0"/>
+                        <a:t>조건</a:t>
+                      </a:r>
+                    </a:p>
+                  </a:txBody>
+                  <a:tcPr anchor="ctr">
+                    <a:solidFill>
+                      <a:schemeClr val="bg1"/>
+                    </a:solidFill>
+                  </a:tcPr>
+                </a:tc>
+                <a:tc>
+                  <a:txBody>
+                    <a:bodyPr/>
+                    <a:lstStyle/>
+                    <a:p>
+                      <a:pPr algn="ctr" latinLnBrk="1"/>
+                      <a:r>
+                        <a:rPr lang="ko-KR" altLang="en-US" dirty="0"/>
+                        <a:t>동작</a:t>
+                      </a:r>
+                    </a:p>
+                  </a:txBody>
+                  <a:tcPr anchor="ctr">
+                    <a:solidFill>
+                      <a:schemeClr val="bg1"/>
+                    </a:solidFill>
+                  </a:tcPr>
+                </a:tc>
+                <a:extLst>
+                  <a:ext uri="{0D108BD9-81ED-4DB2-BD59-A6C34878D82A}">
+                    <a16:rowId xmlns:a16="http://schemas.microsoft.com/office/drawing/2014/main" val="454934788"/>
+                  </a:ext>
+                </a:extLst>
+              </a:tr>
+              <a:tr h="304325">
+                <a:tc rowSpan="4">
+                  <a:txBody>
+                    <a:bodyPr/>
+                    <a:lstStyle/>
+                    <a:p>
+                      <a:pPr algn="ctr" latinLnBrk="1"/>
+                      <a:r>
+                        <a:rPr lang="ko-KR" altLang="en-US" dirty="0"/>
+                        <a:t>랜덤</a:t>
+                      </a:r>
+                    </a:p>
+                  </a:txBody>
+                  <a:tcPr anchor="ctr">
+                    <a:solidFill>
+                      <a:schemeClr val="bg1"/>
+                    </a:solidFill>
+                  </a:tcPr>
+                </a:tc>
+                <a:tc>
+                  <a:txBody>
+                    <a:bodyPr/>
+                    <a:lstStyle/>
+                    <a:p>
+                      <a:pPr algn="ctr" latinLnBrk="1"/>
+                      <a:r>
+                        <a:rPr lang="ko-KR" altLang="en-US" dirty="0"/>
+                        <a:t>미사일 공격</a:t>
+                      </a:r>
+                    </a:p>
+                  </a:txBody>
+                  <a:tcPr anchor="ctr">
+                    <a:solidFill>
+                      <a:schemeClr val="bg1"/>
+                    </a:solidFill>
+                  </a:tcPr>
+                </a:tc>
+                <a:extLst>
+                  <a:ext uri="{0D108BD9-81ED-4DB2-BD59-A6C34878D82A}">
+                    <a16:rowId xmlns:a16="http://schemas.microsoft.com/office/drawing/2014/main" val="2267034679"/>
+                  </a:ext>
+                </a:extLst>
+              </a:tr>
+              <a:tr h="359122">
+                <a:tc vMerge="1">
+                  <a:txBody>
+                    <a:bodyPr/>
+                    <a:lstStyle/>
+                    <a:p>
+                      <a:pPr algn="ctr" latinLnBrk="1"/>
+                      <a:endParaRPr lang="ko-KR" altLang="en-US" dirty="0"/>
+                    </a:p>
+                  </a:txBody>
+                  <a:tcPr anchor="ctr">
+                    <a:solidFill>
+                      <a:schemeClr val="bg1"/>
+                    </a:solidFill>
+                  </a:tcPr>
+                </a:tc>
+                <a:tc>
+                  <a:txBody>
+                    <a:bodyPr/>
+                    <a:lstStyle/>
+                    <a:p>
+                      <a:pPr algn="ctr" latinLnBrk="1"/>
+                      <a:r>
+                        <a:rPr lang="en-US" altLang="ko-KR" dirty="0"/>
+                        <a:t>3</a:t>
+                      </a:r>
+                      <a:r>
+                        <a:rPr lang="ko-KR" altLang="en-US" dirty="0"/>
+                        <a:t>개의 미사일은 땅에 닿으면 폭파</a:t>
+                      </a:r>
+                    </a:p>
+                  </a:txBody>
+                  <a:tcPr anchor="ctr">
+                    <a:solidFill>
+                      <a:schemeClr val="bg1"/>
+                    </a:solidFill>
+                  </a:tcPr>
+                </a:tc>
+                <a:extLst>
+                  <a:ext uri="{0D108BD9-81ED-4DB2-BD59-A6C34878D82A}">
+                    <a16:rowId xmlns:a16="http://schemas.microsoft.com/office/drawing/2014/main" val="1045227227"/>
+                  </a:ext>
+                </a:extLst>
+              </a:tr>
+              <a:tr h="320040">
+                <a:tc vMerge="1">
+                  <a:txBody>
+                    <a:bodyPr/>
+                    <a:lstStyle/>
+                    <a:p>
+                      <a:pPr algn="ctr" latinLnBrk="1"/>
+                      <a:endParaRPr lang="ko-KR" altLang="en-US" dirty="0"/>
+                    </a:p>
+                  </a:txBody>
+                  <a:tcPr anchor="ctr">
+                    <a:solidFill>
+                      <a:schemeClr val="bg1"/>
+                    </a:solidFill>
+                  </a:tcPr>
+                </a:tc>
+                <a:tc>
+                  <a:txBody>
+                    <a:bodyPr/>
+                    <a:lstStyle/>
+                    <a:p>
+                      <a:pPr algn="ctr" latinLnBrk="1"/>
+                      <a:r>
+                        <a:rPr lang="ko-KR" altLang="en-US" dirty="0"/>
+                        <a:t>폭파 애니메이션은 미사일</a:t>
+                      </a:r>
+                      <a:r>
+                        <a:rPr lang="en-US" altLang="ko-KR" dirty="0"/>
+                        <a:t>16.prefab</a:t>
+                      </a:r>
+                      <a:endParaRPr lang="ko-KR" altLang="en-US" dirty="0"/>
+                    </a:p>
+                  </a:txBody>
+                  <a:tcPr anchor="ctr">
+                    <a:solidFill>
+                      <a:schemeClr val="bg1"/>
+                    </a:solidFill>
+                  </a:tcPr>
+                </a:tc>
+                <a:extLst>
+                  <a:ext uri="{0D108BD9-81ED-4DB2-BD59-A6C34878D82A}">
+                    <a16:rowId xmlns:a16="http://schemas.microsoft.com/office/drawing/2014/main" val="1235667259"/>
+                  </a:ext>
+                </a:extLst>
+              </a:tr>
+              <a:tr h="320040">
+                <a:tc vMerge="1">
+                  <a:txBody>
+                    <a:bodyPr/>
+                    <a:lstStyle/>
+                    <a:p>
+                      <a:pPr latinLnBrk="1"/>
+                      <a:endParaRPr lang="ko-KR" altLang="en-US"/>
+                    </a:p>
+                  </a:txBody>
+                  <a:tcPr/>
+                </a:tc>
+                <a:tc>
+                  <a:txBody>
+                    <a:bodyPr/>
+                    <a:lstStyle/>
+                    <a:p>
+                      <a:pPr algn="ctr" latinLnBrk="1"/>
+                      <a:r>
+                        <a:rPr lang="ko-KR" altLang="en-US" dirty="0"/>
+                        <a:t>최대 </a:t>
+                      </a:r>
+                      <a:r>
+                        <a:rPr lang="en-US" altLang="ko-KR" dirty="0"/>
+                        <a:t>4~7</a:t>
+                      </a:r>
+                      <a:r>
+                        <a:rPr lang="ko-KR" altLang="en-US" dirty="0"/>
+                        <a:t>개 발사</a:t>
+                      </a:r>
+                    </a:p>
+                  </a:txBody>
+                  <a:tcPr anchor="ctr">
+                    <a:solidFill>
+                      <a:schemeClr val="bg1"/>
+                    </a:solidFill>
+                  </a:tcPr>
+                </a:tc>
+                <a:extLst>
+                  <a:ext uri="{0D108BD9-81ED-4DB2-BD59-A6C34878D82A}">
+                    <a16:rowId xmlns:a16="http://schemas.microsoft.com/office/drawing/2014/main" val="27508919"/>
+                  </a:ext>
+                </a:extLst>
+              </a:tr>
+            </a:tbl>
+          </a:graphicData>
+        </a:graphic>
+      </p:graphicFrame>
     </p:spTree>
     <p:extLst>
       <p:ext uri="{BB962C8B-B14F-4D97-AF65-F5344CB8AC3E}">
@@ -6080,6 +6724,1835 @@
 </file>
 
 <file path=ppt/slides/slide5.xml><?xml version="1.0" encoding="utf-8"?>
+<p:sld xmlns:a="http://schemas.openxmlformats.org/drawingml/2006/main" xmlns:r="http://schemas.openxmlformats.org/officeDocument/2006/relationships" xmlns:p="http://schemas.openxmlformats.org/presentationml/2006/main">
+  <p:cSld>
+    <p:spTree>
+      <p:nvGrpSpPr>
+        <p:cNvPr id="1" name="">
+          <a:extLst>
+            <a:ext uri="{FF2B5EF4-FFF2-40B4-BE49-F238E27FC236}">
+              <a16:creationId xmlns:a16="http://schemas.microsoft.com/office/drawing/2014/main" id="{F63731A8-51CB-805D-3529-7862A7E25538}"/>
+            </a:ext>
+          </a:extLst>
+        </p:cNvPr>
+        <p:cNvGrpSpPr/>
+        <p:nvPr/>
+      </p:nvGrpSpPr>
+      <p:grpSpPr>
+        <a:xfrm>
+          <a:off x="0" y="0"/>
+          <a:ext cx="0" cy="0"/>
+          <a:chOff x="0" y="0"/>
+          <a:chExt cx="0" cy="0"/>
+        </a:xfrm>
+      </p:grpSpPr>
+      <p:pic>
+        <p:nvPicPr>
+          <p:cNvPr id="3" name="그림 2">
+            <a:extLst>
+              <a:ext uri="{FF2B5EF4-FFF2-40B4-BE49-F238E27FC236}">
+                <a16:creationId xmlns:a16="http://schemas.microsoft.com/office/drawing/2014/main" id="{FE3DD234-3AA5-FB35-3DFF-B0E45CC82B87}"/>
+              </a:ext>
+            </a:extLst>
+          </p:cNvPr>
+          <p:cNvPicPr>
+            <a:picLocks noChangeAspect="1"/>
+          </p:cNvPicPr>
+          <p:nvPr/>
+        </p:nvPicPr>
+        <p:blipFill>
+          <a:blip r:embed="rId2">
+            <a:extLst>
+              <a:ext uri="{28A0092B-C50C-407E-A947-70E740481C1C}">
+                <a14:useLocalDpi xmlns:a14="http://schemas.microsoft.com/office/drawing/2010/main" val="0"/>
+              </a:ext>
+            </a:extLst>
+          </a:blip>
+          <a:stretch>
+            <a:fillRect/>
+          </a:stretch>
+        </p:blipFill>
+        <p:spPr>
+          <a:xfrm flipH="1">
+            <a:off x="8093962" y="1343196"/>
+            <a:ext cx="5642110" cy="4765531"/>
+          </a:xfrm>
+          <a:prstGeom prst="rect">
+            <a:avLst/>
+          </a:prstGeom>
+        </p:spPr>
+      </p:pic>
+      <p:sp>
+        <p:nvSpPr>
+          <p:cNvPr id="13" name="직사각형 12">
+            <a:extLst>
+              <a:ext uri="{FF2B5EF4-FFF2-40B4-BE49-F238E27FC236}">
+                <a16:creationId xmlns:a16="http://schemas.microsoft.com/office/drawing/2014/main" id="{FAA4F63D-522D-C5F9-EE74-5F3274B3A9BE}"/>
+              </a:ext>
+            </a:extLst>
+          </p:cNvPr>
+          <p:cNvSpPr/>
+          <p:nvPr/>
+        </p:nvSpPr>
+        <p:spPr>
+          <a:xfrm>
+            <a:off x="0" y="5966690"/>
+            <a:ext cx="12192000" cy="891310"/>
+          </a:xfrm>
+          <a:prstGeom prst="rect">
+            <a:avLst/>
+          </a:prstGeom>
+        </p:spPr>
+        <p:style>
+          <a:lnRef idx="2">
+            <a:schemeClr val="accent1">
+              <a:shade val="15000"/>
+            </a:schemeClr>
+          </a:lnRef>
+          <a:fillRef idx="1">
+            <a:schemeClr val="accent1"/>
+          </a:fillRef>
+          <a:effectRef idx="0">
+            <a:schemeClr val="accent1"/>
+          </a:effectRef>
+          <a:fontRef idx="minor">
+            <a:schemeClr val="lt1"/>
+          </a:fontRef>
+        </p:style>
+        <p:txBody>
+          <a:bodyPr rtlCol="0" anchor="ctr"/>
+          <a:lstStyle/>
+          <a:p>
+            <a:pPr algn="ctr"/>
+            <a:endParaRPr lang="ko-KR" altLang="en-US"/>
+          </a:p>
+        </p:txBody>
+      </p:sp>
+      <p:sp>
+        <p:nvSpPr>
+          <p:cNvPr id="14" name="직사각형 13">
+            <a:extLst>
+              <a:ext uri="{FF2B5EF4-FFF2-40B4-BE49-F238E27FC236}">
+                <a16:creationId xmlns:a16="http://schemas.microsoft.com/office/drawing/2014/main" id="{54DAC9D3-EAFE-0E73-EB7D-381BCF6946BA}"/>
+              </a:ext>
+            </a:extLst>
+          </p:cNvPr>
+          <p:cNvSpPr/>
+          <p:nvPr/>
+        </p:nvSpPr>
+        <p:spPr>
+          <a:xfrm>
+            <a:off x="318952" y="4895272"/>
+            <a:ext cx="1699491" cy="461818"/>
+          </a:xfrm>
+          <a:prstGeom prst="rect">
+            <a:avLst/>
+          </a:prstGeom>
+        </p:spPr>
+        <p:style>
+          <a:lnRef idx="2">
+            <a:schemeClr val="accent1">
+              <a:shade val="15000"/>
+            </a:schemeClr>
+          </a:lnRef>
+          <a:fillRef idx="1">
+            <a:schemeClr val="accent1"/>
+          </a:fillRef>
+          <a:effectRef idx="0">
+            <a:schemeClr val="accent1"/>
+          </a:effectRef>
+          <a:fontRef idx="minor">
+            <a:schemeClr val="lt1"/>
+          </a:fontRef>
+        </p:style>
+        <p:txBody>
+          <a:bodyPr rtlCol="0" anchor="ctr"/>
+          <a:lstStyle/>
+          <a:p>
+            <a:pPr algn="ctr"/>
+            <a:endParaRPr lang="ko-KR" altLang="en-US"/>
+          </a:p>
+        </p:txBody>
+      </p:sp>
+      <p:sp>
+        <p:nvSpPr>
+          <p:cNvPr id="15" name="직사각형 14">
+            <a:extLst>
+              <a:ext uri="{FF2B5EF4-FFF2-40B4-BE49-F238E27FC236}">
+                <a16:creationId xmlns:a16="http://schemas.microsoft.com/office/drawing/2014/main" id="{FCF31C62-83FA-2E0C-68D4-8576C1CD578E}"/>
+              </a:ext>
+            </a:extLst>
+          </p:cNvPr>
+          <p:cNvSpPr/>
+          <p:nvPr/>
+        </p:nvSpPr>
+        <p:spPr>
+          <a:xfrm>
+            <a:off x="2207491" y="3098801"/>
+            <a:ext cx="1662545" cy="461818"/>
+          </a:xfrm>
+          <a:prstGeom prst="rect">
+            <a:avLst/>
+          </a:prstGeom>
+        </p:spPr>
+        <p:style>
+          <a:lnRef idx="2">
+            <a:schemeClr val="accent1">
+              <a:shade val="15000"/>
+            </a:schemeClr>
+          </a:lnRef>
+          <a:fillRef idx="1">
+            <a:schemeClr val="accent1"/>
+          </a:fillRef>
+          <a:effectRef idx="0">
+            <a:schemeClr val="accent1"/>
+          </a:effectRef>
+          <a:fontRef idx="minor">
+            <a:schemeClr val="lt1"/>
+          </a:fontRef>
+        </p:style>
+        <p:txBody>
+          <a:bodyPr rtlCol="0" anchor="ctr"/>
+          <a:lstStyle/>
+          <a:p>
+            <a:pPr algn="ctr"/>
+            <a:endParaRPr lang="ko-KR" altLang="en-US"/>
+          </a:p>
+        </p:txBody>
+      </p:sp>
+      <p:sp>
+        <p:nvSpPr>
+          <p:cNvPr id="16" name="직사각형 15">
+            <a:extLst>
+              <a:ext uri="{FF2B5EF4-FFF2-40B4-BE49-F238E27FC236}">
+                <a16:creationId xmlns:a16="http://schemas.microsoft.com/office/drawing/2014/main" id="{14D76A6F-60E2-1152-DA0F-0E524D197953}"/>
+              </a:ext>
+            </a:extLst>
+          </p:cNvPr>
+          <p:cNvSpPr/>
+          <p:nvPr/>
+        </p:nvSpPr>
+        <p:spPr>
+          <a:xfrm>
+            <a:off x="4010217" y="1500910"/>
+            <a:ext cx="1550073" cy="461818"/>
+          </a:xfrm>
+          <a:prstGeom prst="rect">
+            <a:avLst/>
+          </a:prstGeom>
+        </p:spPr>
+        <p:style>
+          <a:lnRef idx="2">
+            <a:schemeClr val="accent1">
+              <a:shade val="15000"/>
+            </a:schemeClr>
+          </a:lnRef>
+          <a:fillRef idx="1">
+            <a:schemeClr val="accent1"/>
+          </a:fillRef>
+          <a:effectRef idx="0">
+            <a:schemeClr val="accent1"/>
+          </a:effectRef>
+          <a:fontRef idx="minor">
+            <a:schemeClr val="lt1"/>
+          </a:fontRef>
+        </p:style>
+        <p:txBody>
+          <a:bodyPr rtlCol="0" anchor="ctr"/>
+          <a:lstStyle/>
+          <a:p>
+            <a:pPr algn="ctr"/>
+            <a:endParaRPr lang="ko-KR" altLang="en-US"/>
+          </a:p>
+        </p:txBody>
+      </p:sp>
+      <p:graphicFrame>
+        <p:nvGraphicFramePr>
+          <p:cNvPr id="22" name="표 21">
+            <a:extLst>
+              <a:ext uri="{FF2B5EF4-FFF2-40B4-BE49-F238E27FC236}">
+                <a16:creationId xmlns:a16="http://schemas.microsoft.com/office/drawing/2014/main" id="{9B7E81AC-22A1-32B0-6E37-AA7CE634EEC3}"/>
+              </a:ext>
+            </a:extLst>
+          </p:cNvPr>
+          <p:cNvGraphicFramePr>
+            <a:graphicFrameLocks noGrp="1"/>
+          </p:cNvGraphicFramePr>
+          <p:nvPr>
+            <p:extLst>
+              <p:ext uri="{D42A27DB-BD31-4B8C-83A1-F6EECF244321}">
+                <p14:modId xmlns:p14="http://schemas.microsoft.com/office/powerpoint/2010/main" val="1909746597"/>
+              </p:ext>
+            </p:extLst>
+          </p:nvPr>
+        </p:nvGraphicFramePr>
+        <p:xfrm>
+          <a:off x="5331455" y="154476"/>
+          <a:ext cx="4342360" cy="2377440"/>
+        </p:xfrm>
+        <a:graphic>
+          <a:graphicData uri="http://schemas.openxmlformats.org/drawingml/2006/table">
+            <a:tbl>
+              <a:tblPr firstRow="1" bandRow="1">
+                <a:tableStyleId>{5940675A-B579-460E-94D1-54222C63F5DA}</a:tableStyleId>
+              </a:tblPr>
+              <a:tblGrid>
+                <a:gridCol w="1205111">
+                  <a:extLst>
+                    <a:ext uri="{9D8B030D-6E8A-4147-A177-3AD203B41FA5}">
+                      <a16:colId xmlns:a16="http://schemas.microsoft.com/office/drawing/2014/main" val="3234171030"/>
+                    </a:ext>
+                  </a:extLst>
+                </a:gridCol>
+                <a:gridCol w="3137249">
+                  <a:extLst>
+                    <a:ext uri="{9D8B030D-6E8A-4147-A177-3AD203B41FA5}">
+                      <a16:colId xmlns:a16="http://schemas.microsoft.com/office/drawing/2014/main" val="356375298"/>
+                    </a:ext>
+                  </a:extLst>
+                </a:gridCol>
+              </a:tblGrid>
+              <a:tr h="300714">
+                <a:tc>
+                  <a:txBody>
+                    <a:bodyPr/>
+                    <a:lstStyle/>
+                    <a:p>
+                      <a:pPr algn="ctr" latinLnBrk="1"/>
+                      <a:r>
+                        <a:rPr lang="ko-KR" altLang="en-US" dirty="0"/>
+                        <a:t>조건</a:t>
+                      </a:r>
+                    </a:p>
+                  </a:txBody>
+                  <a:tcPr anchor="ctr">
+                    <a:solidFill>
+                      <a:schemeClr val="bg1"/>
+                    </a:solidFill>
+                  </a:tcPr>
+                </a:tc>
+                <a:tc>
+                  <a:txBody>
+                    <a:bodyPr/>
+                    <a:lstStyle/>
+                    <a:p>
+                      <a:pPr algn="ctr" latinLnBrk="1"/>
+                      <a:r>
+                        <a:rPr lang="ko-KR" altLang="en-US" dirty="0"/>
+                        <a:t>동작</a:t>
+                      </a:r>
+                    </a:p>
+                  </a:txBody>
+                  <a:tcPr anchor="ctr">
+                    <a:solidFill>
+                      <a:schemeClr val="bg1"/>
+                    </a:solidFill>
+                  </a:tcPr>
+                </a:tc>
+                <a:extLst>
+                  <a:ext uri="{0D108BD9-81ED-4DB2-BD59-A6C34878D82A}">
+                    <a16:rowId xmlns:a16="http://schemas.microsoft.com/office/drawing/2014/main" val="454934788"/>
+                  </a:ext>
+                </a:extLst>
+              </a:tr>
+              <a:tr h="304325">
+                <a:tc rowSpan="4">
+                  <a:txBody>
+                    <a:bodyPr/>
+                    <a:lstStyle/>
+                    <a:p>
+                      <a:pPr algn="ctr" latinLnBrk="1"/>
+                      <a:r>
+                        <a:rPr lang="ko-KR" altLang="en-US" dirty="0"/>
+                        <a:t>랜덤</a:t>
+                      </a:r>
+                    </a:p>
+                  </a:txBody>
+                  <a:tcPr anchor="ctr">
+                    <a:solidFill>
+                      <a:schemeClr val="bg1"/>
+                    </a:solidFill>
+                  </a:tcPr>
+                </a:tc>
+                <a:tc>
+                  <a:txBody>
+                    <a:bodyPr/>
+                    <a:lstStyle/>
+                    <a:p>
+                      <a:pPr algn="ctr" latinLnBrk="1"/>
+                      <a:r>
+                        <a:rPr lang="ko-KR" altLang="en-US" dirty="0"/>
+                        <a:t>빨간색 선에서 초록색 </a:t>
+                      </a:r>
+                      <a:endParaRPr lang="en-US" altLang="ko-KR" dirty="0"/>
+                    </a:p>
+                    <a:p>
+                      <a:pPr algn="ctr" latinLnBrk="1"/>
+                      <a:r>
+                        <a:rPr lang="ko-KR" altLang="en-US" dirty="0"/>
+                        <a:t>선까지 레이저가 발사</a:t>
+                      </a:r>
+                    </a:p>
+                  </a:txBody>
+                  <a:tcPr anchor="ctr">
+                    <a:solidFill>
+                      <a:schemeClr val="bg1"/>
+                    </a:solidFill>
+                  </a:tcPr>
+                </a:tc>
+                <a:extLst>
+                  <a:ext uri="{0D108BD9-81ED-4DB2-BD59-A6C34878D82A}">
+                    <a16:rowId xmlns:a16="http://schemas.microsoft.com/office/drawing/2014/main" val="2267034679"/>
+                  </a:ext>
+                </a:extLst>
+              </a:tr>
+              <a:tr h="359122">
+                <a:tc vMerge="1">
+                  <a:txBody>
+                    <a:bodyPr/>
+                    <a:lstStyle/>
+                    <a:p>
+                      <a:pPr algn="ctr" latinLnBrk="1"/>
+                      <a:endParaRPr lang="ko-KR" altLang="en-US" dirty="0"/>
+                    </a:p>
+                  </a:txBody>
+                  <a:tcPr anchor="ctr">
+                    <a:solidFill>
+                      <a:schemeClr val="bg1"/>
+                    </a:solidFill>
+                  </a:tcPr>
+                </a:tc>
+                <a:tc>
+                  <a:txBody>
+                    <a:bodyPr/>
+                    <a:lstStyle/>
+                    <a:p>
+                      <a:pPr algn="ctr" latinLnBrk="1"/>
+                      <a:r>
+                        <a:rPr lang="en-US" altLang="ko-KR" dirty="0"/>
+                        <a:t>2</a:t>
+                      </a:r>
+                      <a:r>
+                        <a:rPr lang="ko-KR" altLang="en-US" dirty="0" err="1"/>
+                        <a:t>초동안</a:t>
+                      </a:r>
+                      <a:r>
+                        <a:rPr lang="ko-KR" altLang="en-US" dirty="0"/>
+                        <a:t> 발사</a:t>
+                      </a:r>
+                    </a:p>
+                  </a:txBody>
+                  <a:tcPr anchor="ctr">
+                    <a:solidFill>
+                      <a:schemeClr val="bg1"/>
+                    </a:solidFill>
+                  </a:tcPr>
+                </a:tc>
+                <a:extLst>
+                  <a:ext uri="{0D108BD9-81ED-4DB2-BD59-A6C34878D82A}">
+                    <a16:rowId xmlns:a16="http://schemas.microsoft.com/office/drawing/2014/main" val="1045227227"/>
+                  </a:ext>
+                </a:extLst>
+              </a:tr>
+              <a:tr h="320040">
+                <a:tc vMerge="1">
+                  <a:txBody>
+                    <a:bodyPr/>
+                    <a:lstStyle/>
+                    <a:p>
+                      <a:pPr algn="ctr" latinLnBrk="1"/>
+                      <a:endParaRPr lang="ko-KR" altLang="en-US" dirty="0"/>
+                    </a:p>
+                  </a:txBody>
+                  <a:tcPr anchor="ctr">
+                    <a:solidFill>
+                      <a:schemeClr val="bg1"/>
+                    </a:solidFill>
+                  </a:tcPr>
+                </a:tc>
+                <a:tc>
+                  <a:txBody>
+                    <a:bodyPr/>
+                    <a:lstStyle/>
+                    <a:p>
+                      <a:pPr algn="ctr" latinLnBrk="1"/>
+                      <a:r>
+                        <a:rPr lang="ko-KR" altLang="en-US" dirty="0" err="1"/>
+                        <a:t>스나이퍼</a:t>
+                      </a:r>
+                      <a:r>
+                        <a:rPr lang="en-US" altLang="ko-KR" dirty="0"/>
+                        <a:t>_0.prefab</a:t>
+                      </a:r>
+                      <a:r>
+                        <a:rPr lang="ko-KR" altLang="en-US" dirty="0"/>
+                        <a:t>을 이용</a:t>
+                      </a:r>
+                    </a:p>
+                  </a:txBody>
+                  <a:tcPr anchor="ctr">
+                    <a:solidFill>
+                      <a:schemeClr val="bg1"/>
+                    </a:solidFill>
+                  </a:tcPr>
+                </a:tc>
+                <a:extLst>
+                  <a:ext uri="{0D108BD9-81ED-4DB2-BD59-A6C34878D82A}">
+                    <a16:rowId xmlns:a16="http://schemas.microsoft.com/office/drawing/2014/main" val="1235667259"/>
+                  </a:ext>
+                </a:extLst>
+              </a:tr>
+              <a:tr h="320040">
+                <a:tc vMerge="1">
+                  <a:txBody>
+                    <a:bodyPr/>
+                    <a:lstStyle/>
+                    <a:p>
+                      <a:pPr latinLnBrk="1"/>
+                      <a:endParaRPr lang="ko-KR" altLang="en-US"/>
+                    </a:p>
+                  </a:txBody>
+                  <a:tcPr/>
+                </a:tc>
+                <a:tc>
+                  <a:txBody>
+                    <a:bodyPr/>
+                    <a:lstStyle/>
+                    <a:p>
+                      <a:pPr algn="ctr" latinLnBrk="1"/>
+                      <a:r>
+                        <a:rPr lang="ko-KR" altLang="en-US" dirty="0" err="1"/>
+                        <a:t>발사하는동안</a:t>
+                      </a:r>
+                      <a:r>
+                        <a:rPr lang="ko-KR" altLang="en-US" dirty="0"/>
+                        <a:t> 무지개색으로 </a:t>
+                      </a:r>
+                      <a:r>
+                        <a:rPr lang="ko-KR" altLang="en-US" dirty="0" err="1"/>
+                        <a:t>그라데이션으로</a:t>
+                      </a:r>
+                      <a:r>
+                        <a:rPr lang="ko-KR" altLang="en-US" dirty="0"/>
+                        <a:t> </a:t>
+                      </a:r>
+                      <a:r>
+                        <a:rPr lang="ko-KR" altLang="en-US" dirty="0" err="1"/>
+                        <a:t>바뀌어야함</a:t>
+                      </a:r>
+                      <a:endParaRPr lang="ko-KR" altLang="en-US" dirty="0"/>
+                    </a:p>
+                  </a:txBody>
+                  <a:tcPr anchor="ctr">
+                    <a:solidFill>
+                      <a:schemeClr val="bg1"/>
+                    </a:solidFill>
+                  </a:tcPr>
+                </a:tc>
+                <a:extLst>
+                  <a:ext uri="{0D108BD9-81ED-4DB2-BD59-A6C34878D82A}">
+                    <a16:rowId xmlns:a16="http://schemas.microsoft.com/office/drawing/2014/main" val="1755757102"/>
+                  </a:ext>
+                </a:extLst>
+              </a:tr>
+            </a:tbl>
+          </a:graphicData>
+        </a:graphic>
+      </p:graphicFrame>
+      <p:pic>
+        <p:nvPicPr>
+          <p:cNvPr id="4" name="그림 3">
+            <a:extLst>
+              <a:ext uri="{FF2B5EF4-FFF2-40B4-BE49-F238E27FC236}">
+                <a16:creationId xmlns:a16="http://schemas.microsoft.com/office/drawing/2014/main" id="{29F94FA0-A264-1CA5-6121-F7105B4D8159}"/>
+              </a:ext>
+            </a:extLst>
+          </p:cNvPr>
+          <p:cNvPicPr>
+            <a:picLocks noChangeAspect="1"/>
+          </p:cNvPicPr>
+          <p:nvPr/>
+        </p:nvPicPr>
+        <p:blipFill>
+          <a:blip r:embed="rId3">
+            <a:extLst>
+              <a:ext uri="{28A0092B-C50C-407E-A947-70E740481C1C}">
+                <a14:useLocalDpi xmlns:a14="http://schemas.microsoft.com/office/drawing/2010/main" val="0"/>
+              </a:ext>
+            </a:extLst>
+          </a:blip>
+          <a:stretch>
+            <a:fillRect/>
+          </a:stretch>
+        </p:blipFill>
+        <p:spPr>
+          <a:xfrm>
+            <a:off x="203200" y="5390392"/>
+            <a:ext cx="9444981" cy="812698"/>
+          </a:xfrm>
+          <a:prstGeom prst="rect">
+            <a:avLst/>
+          </a:prstGeom>
+        </p:spPr>
+      </p:pic>
+      <p:pic>
+        <p:nvPicPr>
+          <p:cNvPr id="5" name="그림 4">
+            <a:extLst>
+              <a:ext uri="{FF2B5EF4-FFF2-40B4-BE49-F238E27FC236}">
+                <a16:creationId xmlns:a16="http://schemas.microsoft.com/office/drawing/2014/main" id="{654CADDC-0E23-4639-8634-F32F880FA91C}"/>
+              </a:ext>
+            </a:extLst>
+          </p:cNvPr>
+          <p:cNvPicPr>
+            <a:picLocks noChangeAspect="1"/>
+          </p:cNvPicPr>
+          <p:nvPr/>
+        </p:nvPicPr>
+        <p:blipFill>
+          <a:blip r:embed="rId3">
+            <a:duotone>
+              <a:schemeClr val="accent6">
+                <a:shade val="45000"/>
+                <a:satMod val="135000"/>
+              </a:schemeClr>
+              <a:prstClr val="white"/>
+            </a:duotone>
+            <a:extLst>
+              <a:ext uri="{28A0092B-C50C-407E-A947-70E740481C1C}">
+                <a14:useLocalDpi xmlns:a14="http://schemas.microsoft.com/office/drawing/2010/main" val="0"/>
+              </a:ext>
+            </a:extLst>
+          </a:blip>
+          <a:stretch>
+            <a:fillRect/>
+          </a:stretch>
+        </p:blipFill>
+        <p:spPr>
+          <a:xfrm rot="1928176">
+            <a:off x="913804" y="3022650"/>
+            <a:ext cx="9444981" cy="812698"/>
+          </a:xfrm>
+          <a:prstGeom prst="rect">
+            <a:avLst/>
+          </a:prstGeom>
+        </p:spPr>
+      </p:pic>
+    </p:spTree>
+    <p:extLst>
+      <p:ext uri="{BB962C8B-B14F-4D97-AF65-F5344CB8AC3E}">
+        <p14:creationId xmlns:p14="http://schemas.microsoft.com/office/powerpoint/2010/main" val="2396341998"/>
+      </p:ext>
+    </p:extLst>
+  </p:cSld>
+  <p:clrMapOvr>
+    <a:masterClrMapping/>
+  </p:clrMapOvr>
+</p:sld>
+</file>
+
+<file path=ppt/slides/slide6.xml><?xml version="1.0" encoding="utf-8"?>
+<p:sld xmlns:a="http://schemas.openxmlformats.org/drawingml/2006/main" xmlns:r="http://schemas.openxmlformats.org/officeDocument/2006/relationships" xmlns:p="http://schemas.openxmlformats.org/presentationml/2006/main">
+  <p:cSld>
+    <p:spTree>
+      <p:nvGrpSpPr>
+        <p:cNvPr id="1" name="">
+          <a:extLst>
+            <a:ext uri="{FF2B5EF4-FFF2-40B4-BE49-F238E27FC236}">
+              <a16:creationId xmlns:a16="http://schemas.microsoft.com/office/drawing/2014/main" id="{6FF6DB2D-94B0-27C4-E4CA-7A1223F7CAC2}"/>
+            </a:ext>
+          </a:extLst>
+        </p:cNvPr>
+        <p:cNvGrpSpPr/>
+        <p:nvPr/>
+      </p:nvGrpSpPr>
+      <p:grpSpPr>
+        <a:xfrm>
+          <a:off x="0" y="0"/>
+          <a:ext cx="0" cy="0"/>
+          <a:chOff x="0" y="0"/>
+          <a:chExt cx="0" cy="0"/>
+        </a:xfrm>
+      </p:grpSpPr>
+      <p:pic>
+        <p:nvPicPr>
+          <p:cNvPr id="3" name="그림 2">
+            <a:extLst>
+              <a:ext uri="{FF2B5EF4-FFF2-40B4-BE49-F238E27FC236}">
+                <a16:creationId xmlns:a16="http://schemas.microsoft.com/office/drawing/2014/main" id="{E8BC3255-44EF-6164-A642-B9E64FED201D}"/>
+              </a:ext>
+            </a:extLst>
+          </p:cNvPr>
+          <p:cNvPicPr>
+            <a:picLocks noChangeAspect="1"/>
+          </p:cNvPicPr>
+          <p:nvPr/>
+        </p:nvPicPr>
+        <p:blipFill>
+          <a:blip r:embed="rId2">
+            <a:extLst>
+              <a:ext uri="{28A0092B-C50C-407E-A947-70E740481C1C}">
+                <a14:useLocalDpi xmlns:a14="http://schemas.microsoft.com/office/drawing/2010/main" val="0"/>
+              </a:ext>
+            </a:extLst>
+          </a:blip>
+          <a:stretch>
+            <a:fillRect/>
+          </a:stretch>
+        </p:blipFill>
+        <p:spPr>
+          <a:xfrm flipH="1">
+            <a:off x="8093962" y="1343196"/>
+            <a:ext cx="5642110" cy="4765531"/>
+          </a:xfrm>
+          <a:prstGeom prst="rect">
+            <a:avLst/>
+          </a:prstGeom>
+        </p:spPr>
+      </p:pic>
+      <p:sp>
+        <p:nvSpPr>
+          <p:cNvPr id="13" name="직사각형 12">
+            <a:extLst>
+              <a:ext uri="{FF2B5EF4-FFF2-40B4-BE49-F238E27FC236}">
+                <a16:creationId xmlns:a16="http://schemas.microsoft.com/office/drawing/2014/main" id="{3D37CCCF-F3B0-A488-F362-B719C4F9A6EE}"/>
+              </a:ext>
+            </a:extLst>
+          </p:cNvPr>
+          <p:cNvSpPr/>
+          <p:nvPr/>
+        </p:nvSpPr>
+        <p:spPr>
+          <a:xfrm>
+            <a:off x="0" y="5966690"/>
+            <a:ext cx="12192000" cy="891310"/>
+          </a:xfrm>
+          <a:prstGeom prst="rect">
+            <a:avLst/>
+          </a:prstGeom>
+        </p:spPr>
+        <p:style>
+          <a:lnRef idx="2">
+            <a:schemeClr val="accent1">
+              <a:shade val="15000"/>
+            </a:schemeClr>
+          </a:lnRef>
+          <a:fillRef idx="1">
+            <a:schemeClr val="accent1"/>
+          </a:fillRef>
+          <a:effectRef idx="0">
+            <a:schemeClr val="accent1"/>
+          </a:effectRef>
+          <a:fontRef idx="minor">
+            <a:schemeClr val="lt1"/>
+          </a:fontRef>
+        </p:style>
+        <p:txBody>
+          <a:bodyPr rtlCol="0" anchor="ctr"/>
+          <a:lstStyle/>
+          <a:p>
+            <a:pPr algn="ctr"/>
+            <a:endParaRPr lang="ko-KR" altLang="en-US"/>
+          </a:p>
+        </p:txBody>
+      </p:sp>
+      <p:sp>
+        <p:nvSpPr>
+          <p:cNvPr id="14" name="직사각형 13">
+            <a:extLst>
+              <a:ext uri="{FF2B5EF4-FFF2-40B4-BE49-F238E27FC236}">
+                <a16:creationId xmlns:a16="http://schemas.microsoft.com/office/drawing/2014/main" id="{3DF8BAC6-6882-2662-7BC2-4A606680CA54}"/>
+              </a:ext>
+            </a:extLst>
+          </p:cNvPr>
+          <p:cNvSpPr/>
+          <p:nvPr/>
+        </p:nvSpPr>
+        <p:spPr>
+          <a:xfrm>
+            <a:off x="318952" y="4895272"/>
+            <a:ext cx="1699491" cy="461818"/>
+          </a:xfrm>
+          <a:prstGeom prst="rect">
+            <a:avLst/>
+          </a:prstGeom>
+        </p:spPr>
+        <p:style>
+          <a:lnRef idx="2">
+            <a:schemeClr val="accent1">
+              <a:shade val="15000"/>
+            </a:schemeClr>
+          </a:lnRef>
+          <a:fillRef idx="1">
+            <a:schemeClr val="accent1"/>
+          </a:fillRef>
+          <a:effectRef idx="0">
+            <a:schemeClr val="accent1"/>
+          </a:effectRef>
+          <a:fontRef idx="minor">
+            <a:schemeClr val="lt1"/>
+          </a:fontRef>
+        </p:style>
+        <p:txBody>
+          <a:bodyPr rtlCol="0" anchor="ctr"/>
+          <a:lstStyle/>
+          <a:p>
+            <a:pPr algn="ctr"/>
+            <a:endParaRPr lang="ko-KR" altLang="en-US"/>
+          </a:p>
+        </p:txBody>
+      </p:sp>
+      <p:sp>
+        <p:nvSpPr>
+          <p:cNvPr id="15" name="직사각형 14">
+            <a:extLst>
+              <a:ext uri="{FF2B5EF4-FFF2-40B4-BE49-F238E27FC236}">
+                <a16:creationId xmlns:a16="http://schemas.microsoft.com/office/drawing/2014/main" id="{588DCF6E-6843-C654-2A16-11CA918A9E30}"/>
+              </a:ext>
+            </a:extLst>
+          </p:cNvPr>
+          <p:cNvSpPr/>
+          <p:nvPr/>
+        </p:nvSpPr>
+        <p:spPr>
+          <a:xfrm>
+            <a:off x="2207491" y="3098801"/>
+            <a:ext cx="1662545" cy="461818"/>
+          </a:xfrm>
+          <a:prstGeom prst="rect">
+            <a:avLst/>
+          </a:prstGeom>
+        </p:spPr>
+        <p:style>
+          <a:lnRef idx="2">
+            <a:schemeClr val="accent1">
+              <a:shade val="15000"/>
+            </a:schemeClr>
+          </a:lnRef>
+          <a:fillRef idx="1">
+            <a:schemeClr val="accent1"/>
+          </a:fillRef>
+          <a:effectRef idx="0">
+            <a:schemeClr val="accent1"/>
+          </a:effectRef>
+          <a:fontRef idx="minor">
+            <a:schemeClr val="lt1"/>
+          </a:fontRef>
+        </p:style>
+        <p:txBody>
+          <a:bodyPr rtlCol="0" anchor="ctr"/>
+          <a:lstStyle/>
+          <a:p>
+            <a:pPr algn="ctr"/>
+            <a:endParaRPr lang="ko-KR" altLang="en-US"/>
+          </a:p>
+        </p:txBody>
+      </p:sp>
+      <p:sp>
+        <p:nvSpPr>
+          <p:cNvPr id="16" name="직사각형 15">
+            <a:extLst>
+              <a:ext uri="{FF2B5EF4-FFF2-40B4-BE49-F238E27FC236}">
+                <a16:creationId xmlns:a16="http://schemas.microsoft.com/office/drawing/2014/main" id="{E86E73D3-C942-AA18-A87D-EF24982778BB}"/>
+              </a:ext>
+            </a:extLst>
+          </p:cNvPr>
+          <p:cNvSpPr/>
+          <p:nvPr/>
+        </p:nvSpPr>
+        <p:spPr>
+          <a:xfrm>
+            <a:off x="4010217" y="1500910"/>
+            <a:ext cx="1550073" cy="461818"/>
+          </a:xfrm>
+          <a:prstGeom prst="rect">
+            <a:avLst/>
+          </a:prstGeom>
+        </p:spPr>
+        <p:style>
+          <a:lnRef idx="2">
+            <a:schemeClr val="accent1">
+              <a:shade val="15000"/>
+            </a:schemeClr>
+          </a:lnRef>
+          <a:fillRef idx="1">
+            <a:schemeClr val="accent1"/>
+          </a:fillRef>
+          <a:effectRef idx="0">
+            <a:schemeClr val="accent1"/>
+          </a:effectRef>
+          <a:fontRef idx="minor">
+            <a:schemeClr val="lt1"/>
+          </a:fontRef>
+        </p:style>
+        <p:txBody>
+          <a:bodyPr rtlCol="0" anchor="ctr"/>
+          <a:lstStyle/>
+          <a:p>
+            <a:pPr algn="ctr"/>
+            <a:endParaRPr lang="ko-KR" altLang="en-US"/>
+          </a:p>
+        </p:txBody>
+      </p:sp>
+      <p:pic>
+        <p:nvPicPr>
+          <p:cNvPr id="2" name="그림 1">
+            <a:extLst>
+              <a:ext uri="{FF2B5EF4-FFF2-40B4-BE49-F238E27FC236}">
+                <a16:creationId xmlns:a16="http://schemas.microsoft.com/office/drawing/2014/main" id="{B91FC999-B854-D9A8-D5C7-8D805326A554}"/>
+              </a:ext>
+            </a:extLst>
+          </p:cNvPr>
+          <p:cNvPicPr>
+            <a:picLocks noChangeAspect="1"/>
+          </p:cNvPicPr>
+          <p:nvPr/>
+        </p:nvPicPr>
+        <p:blipFill>
+          <a:blip r:embed="rId3">
+            <a:extLst>
+              <a:ext uri="{28A0092B-C50C-407E-A947-70E740481C1C}">
+                <a14:useLocalDpi xmlns:a14="http://schemas.microsoft.com/office/drawing/2010/main" val="0"/>
+              </a:ext>
+            </a:extLst>
+          </a:blip>
+          <a:srcRect t="5929" r="74375" b="54057"/>
+          <a:stretch>
+            <a:fillRect/>
+          </a:stretch>
+        </p:blipFill>
+        <p:spPr>
+          <a:xfrm>
+            <a:off x="435841" y="14658"/>
+            <a:ext cx="1771650" cy="1544792"/>
+          </a:xfrm>
+          <a:prstGeom prst="rect">
+            <a:avLst/>
+          </a:prstGeom>
+        </p:spPr>
+      </p:pic>
+      <p:pic>
+        <p:nvPicPr>
+          <p:cNvPr id="6" name="그림 5">
+            <a:extLst>
+              <a:ext uri="{FF2B5EF4-FFF2-40B4-BE49-F238E27FC236}">
+                <a16:creationId xmlns:a16="http://schemas.microsoft.com/office/drawing/2014/main" id="{9B3922A8-CDFF-83D7-69D9-68994069B761}"/>
+              </a:ext>
+            </a:extLst>
+          </p:cNvPr>
+          <p:cNvPicPr>
+            <a:picLocks noChangeAspect="1"/>
+          </p:cNvPicPr>
+          <p:nvPr/>
+        </p:nvPicPr>
+        <p:blipFill>
+          <a:blip r:embed="rId3">
+            <a:extLst>
+              <a:ext uri="{28A0092B-C50C-407E-A947-70E740481C1C}">
+                <a14:useLocalDpi xmlns:a14="http://schemas.microsoft.com/office/drawing/2010/main" val="0"/>
+              </a:ext>
+            </a:extLst>
+          </a:blip>
+          <a:srcRect t="5929" r="74375" b="54057"/>
+          <a:stretch>
+            <a:fillRect/>
+          </a:stretch>
+        </p:blipFill>
+        <p:spPr>
+          <a:xfrm>
+            <a:off x="6511360" y="105915"/>
+            <a:ext cx="1771650" cy="1544792"/>
+          </a:xfrm>
+          <a:prstGeom prst="rect">
+            <a:avLst/>
+          </a:prstGeom>
+        </p:spPr>
+      </p:pic>
+      <p:graphicFrame>
+        <p:nvGraphicFramePr>
+          <p:cNvPr id="7" name="표 6">
+            <a:extLst>
+              <a:ext uri="{FF2B5EF4-FFF2-40B4-BE49-F238E27FC236}">
+                <a16:creationId xmlns:a16="http://schemas.microsoft.com/office/drawing/2014/main" id="{BD684612-56D5-5ECD-CF73-FADE00031EA8}"/>
+              </a:ext>
+            </a:extLst>
+          </p:cNvPr>
+          <p:cNvGraphicFramePr>
+            <a:graphicFrameLocks noGrp="1"/>
+          </p:cNvGraphicFramePr>
+          <p:nvPr>
+            <p:extLst>
+              <p:ext uri="{D42A27DB-BD31-4B8C-83A1-F6EECF244321}">
+                <p14:modId xmlns:p14="http://schemas.microsoft.com/office/powerpoint/2010/main" val="2409492109"/>
+              </p:ext>
+            </p:extLst>
+          </p:nvPr>
+        </p:nvGraphicFramePr>
+        <p:xfrm>
+          <a:off x="4962001" y="3429000"/>
+          <a:ext cx="4342360" cy="1444736"/>
+        </p:xfrm>
+        <a:graphic>
+          <a:graphicData uri="http://schemas.openxmlformats.org/drawingml/2006/table">
+            <a:tbl>
+              <a:tblPr firstRow="1" bandRow="1">
+                <a:tableStyleId>{5940675A-B579-460E-94D1-54222C63F5DA}</a:tableStyleId>
+              </a:tblPr>
+              <a:tblGrid>
+                <a:gridCol w="1205111">
+                  <a:extLst>
+                    <a:ext uri="{9D8B030D-6E8A-4147-A177-3AD203B41FA5}">
+                      <a16:colId xmlns:a16="http://schemas.microsoft.com/office/drawing/2014/main" val="3234171030"/>
+                    </a:ext>
+                  </a:extLst>
+                </a:gridCol>
+                <a:gridCol w="3137249">
+                  <a:extLst>
+                    <a:ext uri="{9D8B030D-6E8A-4147-A177-3AD203B41FA5}">
+                      <a16:colId xmlns:a16="http://schemas.microsoft.com/office/drawing/2014/main" val="356375298"/>
+                    </a:ext>
+                  </a:extLst>
+                </a:gridCol>
+              </a:tblGrid>
+              <a:tr h="261074">
+                <a:tc>
+                  <a:txBody>
+                    <a:bodyPr/>
+                    <a:lstStyle/>
+                    <a:p>
+                      <a:pPr algn="ctr" latinLnBrk="1"/>
+                      <a:r>
+                        <a:rPr lang="ko-KR" altLang="en-US" dirty="0"/>
+                        <a:t>조건</a:t>
+                      </a:r>
+                    </a:p>
+                  </a:txBody>
+                  <a:tcPr anchor="ctr">
+                    <a:solidFill>
+                      <a:schemeClr val="bg1"/>
+                    </a:solidFill>
+                  </a:tcPr>
+                </a:tc>
+                <a:tc>
+                  <a:txBody>
+                    <a:bodyPr/>
+                    <a:lstStyle/>
+                    <a:p>
+                      <a:pPr algn="ctr" latinLnBrk="1"/>
+                      <a:r>
+                        <a:rPr lang="ko-KR" altLang="en-US" dirty="0"/>
+                        <a:t>동작</a:t>
+                      </a:r>
+                    </a:p>
+                  </a:txBody>
+                  <a:tcPr anchor="ctr">
+                    <a:solidFill>
+                      <a:schemeClr val="bg1"/>
+                    </a:solidFill>
+                  </a:tcPr>
+                </a:tc>
+                <a:extLst>
+                  <a:ext uri="{0D108BD9-81ED-4DB2-BD59-A6C34878D82A}">
+                    <a16:rowId xmlns:a16="http://schemas.microsoft.com/office/drawing/2014/main" val="454934788"/>
+                  </a:ext>
+                </a:extLst>
+              </a:tr>
+              <a:tr h="261074">
+                <a:tc rowSpan="2">
+                  <a:txBody>
+                    <a:bodyPr/>
+                    <a:lstStyle/>
+                    <a:p>
+                      <a:pPr algn="ctr" latinLnBrk="1"/>
+                      <a:r>
+                        <a:rPr lang="ko-KR" altLang="en-US" dirty="0"/>
+                        <a:t>랜덤</a:t>
+                      </a:r>
+                    </a:p>
+                  </a:txBody>
+                  <a:tcPr anchor="ctr">
+                    <a:solidFill>
+                      <a:schemeClr val="bg1"/>
+                    </a:solidFill>
+                  </a:tcPr>
+                </a:tc>
+                <a:tc>
+                  <a:txBody>
+                    <a:bodyPr/>
+                    <a:lstStyle/>
+                    <a:p>
+                      <a:pPr algn="ctr" latinLnBrk="1"/>
+                      <a:r>
+                        <a:rPr lang="ko-KR" altLang="en-US" dirty="0" err="1"/>
+                        <a:t>원거리몹을</a:t>
+                      </a:r>
+                      <a:r>
+                        <a:rPr lang="ko-KR" altLang="en-US" dirty="0"/>
+                        <a:t> 소환</a:t>
+                      </a:r>
+                    </a:p>
+                  </a:txBody>
+                  <a:tcPr anchor="ctr">
+                    <a:solidFill>
+                      <a:schemeClr val="bg1"/>
+                    </a:solidFill>
+                  </a:tcPr>
+                </a:tc>
+                <a:extLst>
+                  <a:ext uri="{0D108BD9-81ED-4DB2-BD59-A6C34878D82A}">
+                    <a16:rowId xmlns:a16="http://schemas.microsoft.com/office/drawing/2014/main" val="2267034679"/>
+                  </a:ext>
+                </a:extLst>
+              </a:tr>
+              <a:tr h="713216">
+                <a:tc vMerge="1">
+                  <a:txBody>
+                    <a:bodyPr/>
+                    <a:lstStyle/>
+                    <a:p>
+                      <a:pPr algn="ctr" latinLnBrk="1"/>
+                      <a:endParaRPr lang="ko-KR" altLang="en-US" dirty="0"/>
+                    </a:p>
+                  </a:txBody>
+                  <a:tcPr anchor="ctr">
+                    <a:solidFill>
+                      <a:schemeClr val="bg1"/>
+                    </a:solidFill>
+                  </a:tcPr>
+                </a:tc>
+                <a:tc>
+                  <a:txBody>
+                    <a:bodyPr/>
+                    <a:lstStyle/>
+                    <a:p>
+                      <a:pPr algn="ctr" latinLnBrk="1"/>
+                      <a:r>
+                        <a:rPr lang="ko-KR" altLang="en-US" dirty="0"/>
+                        <a:t>원거리 </a:t>
+                      </a:r>
+                      <a:r>
+                        <a:rPr lang="ko-KR" altLang="en-US" dirty="0" err="1"/>
+                        <a:t>몹이</a:t>
+                      </a:r>
+                      <a:r>
+                        <a:rPr lang="ko-KR" altLang="en-US" dirty="0"/>
+                        <a:t> </a:t>
+                      </a:r>
+                      <a:r>
+                        <a:rPr lang="ko-KR" altLang="en-US" dirty="0" err="1"/>
+                        <a:t>살아있는동안</a:t>
+                      </a:r>
+                      <a:r>
+                        <a:rPr lang="ko-KR" altLang="en-US" dirty="0"/>
+                        <a:t> 소환불가능</a:t>
+                      </a:r>
+                    </a:p>
+                  </a:txBody>
+                  <a:tcPr anchor="ctr">
+                    <a:solidFill>
+                      <a:schemeClr val="bg1"/>
+                    </a:solidFill>
+                  </a:tcPr>
+                </a:tc>
+                <a:extLst>
+                  <a:ext uri="{0D108BD9-81ED-4DB2-BD59-A6C34878D82A}">
+                    <a16:rowId xmlns:a16="http://schemas.microsoft.com/office/drawing/2014/main" val="1045227227"/>
+                  </a:ext>
+                </a:extLst>
+              </a:tr>
+            </a:tbl>
+          </a:graphicData>
+        </a:graphic>
+      </p:graphicFrame>
+    </p:spTree>
+    <p:extLst>
+      <p:ext uri="{BB962C8B-B14F-4D97-AF65-F5344CB8AC3E}">
+        <p14:creationId xmlns:p14="http://schemas.microsoft.com/office/powerpoint/2010/main" val="1197646837"/>
+      </p:ext>
+    </p:extLst>
+  </p:cSld>
+  <p:clrMapOvr>
+    <a:masterClrMapping/>
+  </p:clrMapOvr>
+</p:sld>
+</file>
+
+<file path=ppt/slides/slide7.xml><?xml version="1.0" encoding="utf-8"?>
+<p:sld xmlns:a="http://schemas.openxmlformats.org/drawingml/2006/main" xmlns:r="http://schemas.openxmlformats.org/officeDocument/2006/relationships" xmlns:p="http://schemas.openxmlformats.org/presentationml/2006/main">
+  <p:cSld>
+    <p:spTree>
+      <p:nvGrpSpPr>
+        <p:cNvPr id="1" name="">
+          <a:extLst>
+            <a:ext uri="{FF2B5EF4-FFF2-40B4-BE49-F238E27FC236}">
+              <a16:creationId xmlns:a16="http://schemas.microsoft.com/office/drawing/2014/main" id="{32275641-BEBB-DF42-ACA5-9AF284E00709}"/>
+            </a:ext>
+          </a:extLst>
+        </p:cNvPr>
+        <p:cNvGrpSpPr/>
+        <p:nvPr/>
+      </p:nvGrpSpPr>
+      <p:grpSpPr>
+        <a:xfrm>
+          <a:off x="0" y="0"/>
+          <a:ext cx="0" cy="0"/>
+          <a:chOff x="0" y="0"/>
+          <a:chExt cx="0" cy="0"/>
+        </a:xfrm>
+      </p:grpSpPr>
+      <p:pic>
+        <p:nvPicPr>
+          <p:cNvPr id="3" name="그림 2">
+            <a:extLst>
+              <a:ext uri="{FF2B5EF4-FFF2-40B4-BE49-F238E27FC236}">
+                <a16:creationId xmlns:a16="http://schemas.microsoft.com/office/drawing/2014/main" id="{A164D227-5324-566D-8EFB-268A8497634A}"/>
+              </a:ext>
+            </a:extLst>
+          </p:cNvPr>
+          <p:cNvPicPr>
+            <a:picLocks noChangeAspect="1"/>
+          </p:cNvPicPr>
+          <p:nvPr/>
+        </p:nvPicPr>
+        <p:blipFill>
+          <a:blip r:embed="rId2">
+            <a:extLst>
+              <a:ext uri="{28A0092B-C50C-407E-A947-70E740481C1C}">
+                <a14:useLocalDpi xmlns:a14="http://schemas.microsoft.com/office/drawing/2010/main" val="0"/>
+              </a:ext>
+            </a:extLst>
+          </a:blip>
+          <a:stretch>
+            <a:fillRect/>
+          </a:stretch>
+        </p:blipFill>
+        <p:spPr>
+          <a:xfrm flipH="1">
+            <a:off x="8093962" y="1343196"/>
+            <a:ext cx="5642110" cy="4765531"/>
+          </a:xfrm>
+          <a:prstGeom prst="rect">
+            <a:avLst/>
+          </a:prstGeom>
+        </p:spPr>
+      </p:pic>
+      <p:sp>
+        <p:nvSpPr>
+          <p:cNvPr id="13" name="직사각형 12">
+            <a:extLst>
+              <a:ext uri="{FF2B5EF4-FFF2-40B4-BE49-F238E27FC236}">
+                <a16:creationId xmlns:a16="http://schemas.microsoft.com/office/drawing/2014/main" id="{E3D0A136-BF11-B73C-9690-4236A2D367ED}"/>
+              </a:ext>
+            </a:extLst>
+          </p:cNvPr>
+          <p:cNvSpPr/>
+          <p:nvPr/>
+        </p:nvSpPr>
+        <p:spPr>
+          <a:xfrm>
+            <a:off x="0" y="5966690"/>
+            <a:ext cx="12192000" cy="891310"/>
+          </a:xfrm>
+          <a:prstGeom prst="rect">
+            <a:avLst/>
+          </a:prstGeom>
+        </p:spPr>
+        <p:style>
+          <a:lnRef idx="2">
+            <a:schemeClr val="accent1">
+              <a:shade val="15000"/>
+            </a:schemeClr>
+          </a:lnRef>
+          <a:fillRef idx="1">
+            <a:schemeClr val="accent1"/>
+          </a:fillRef>
+          <a:effectRef idx="0">
+            <a:schemeClr val="accent1"/>
+          </a:effectRef>
+          <a:fontRef idx="minor">
+            <a:schemeClr val="lt1"/>
+          </a:fontRef>
+        </p:style>
+        <p:txBody>
+          <a:bodyPr rtlCol="0" anchor="ctr"/>
+          <a:lstStyle/>
+          <a:p>
+            <a:pPr algn="ctr"/>
+            <a:endParaRPr lang="ko-KR" altLang="en-US"/>
+          </a:p>
+        </p:txBody>
+      </p:sp>
+      <p:sp>
+        <p:nvSpPr>
+          <p:cNvPr id="14" name="직사각형 13">
+            <a:extLst>
+              <a:ext uri="{FF2B5EF4-FFF2-40B4-BE49-F238E27FC236}">
+                <a16:creationId xmlns:a16="http://schemas.microsoft.com/office/drawing/2014/main" id="{1D2ABB91-1EB0-BD5C-DB29-A14C89832A1C}"/>
+              </a:ext>
+            </a:extLst>
+          </p:cNvPr>
+          <p:cNvSpPr/>
+          <p:nvPr/>
+        </p:nvSpPr>
+        <p:spPr>
+          <a:xfrm>
+            <a:off x="318952" y="4895272"/>
+            <a:ext cx="1699491" cy="461818"/>
+          </a:xfrm>
+          <a:prstGeom prst="rect">
+            <a:avLst/>
+          </a:prstGeom>
+        </p:spPr>
+        <p:style>
+          <a:lnRef idx="2">
+            <a:schemeClr val="accent1">
+              <a:shade val="15000"/>
+            </a:schemeClr>
+          </a:lnRef>
+          <a:fillRef idx="1">
+            <a:schemeClr val="accent1"/>
+          </a:fillRef>
+          <a:effectRef idx="0">
+            <a:schemeClr val="accent1"/>
+          </a:effectRef>
+          <a:fontRef idx="minor">
+            <a:schemeClr val="lt1"/>
+          </a:fontRef>
+        </p:style>
+        <p:txBody>
+          <a:bodyPr rtlCol="0" anchor="ctr"/>
+          <a:lstStyle/>
+          <a:p>
+            <a:pPr algn="ctr"/>
+            <a:endParaRPr lang="ko-KR" altLang="en-US"/>
+          </a:p>
+        </p:txBody>
+      </p:sp>
+      <p:sp>
+        <p:nvSpPr>
+          <p:cNvPr id="15" name="직사각형 14">
+            <a:extLst>
+              <a:ext uri="{FF2B5EF4-FFF2-40B4-BE49-F238E27FC236}">
+                <a16:creationId xmlns:a16="http://schemas.microsoft.com/office/drawing/2014/main" id="{26A04C53-7D78-15AE-9B71-70E19650F053}"/>
+              </a:ext>
+            </a:extLst>
+          </p:cNvPr>
+          <p:cNvSpPr/>
+          <p:nvPr/>
+        </p:nvSpPr>
+        <p:spPr>
+          <a:xfrm>
+            <a:off x="2207491" y="3098801"/>
+            <a:ext cx="1662545" cy="461818"/>
+          </a:xfrm>
+          <a:prstGeom prst="rect">
+            <a:avLst/>
+          </a:prstGeom>
+        </p:spPr>
+        <p:style>
+          <a:lnRef idx="2">
+            <a:schemeClr val="accent1">
+              <a:shade val="15000"/>
+            </a:schemeClr>
+          </a:lnRef>
+          <a:fillRef idx="1">
+            <a:schemeClr val="accent1"/>
+          </a:fillRef>
+          <a:effectRef idx="0">
+            <a:schemeClr val="accent1"/>
+          </a:effectRef>
+          <a:fontRef idx="minor">
+            <a:schemeClr val="lt1"/>
+          </a:fontRef>
+        </p:style>
+        <p:txBody>
+          <a:bodyPr rtlCol="0" anchor="ctr"/>
+          <a:lstStyle/>
+          <a:p>
+            <a:pPr algn="ctr"/>
+            <a:endParaRPr lang="ko-KR" altLang="en-US"/>
+          </a:p>
+        </p:txBody>
+      </p:sp>
+      <p:sp>
+        <p:nvSpPr>
+          <p:cNvPr id="16" name="직사각형 15">
+            <a:extLst>
+              <a:ext uri="{FF2B5EF4-FFF2-40B4-BE49-F238E27FC236}">
+                <a16:creationId xmlns:a16="http://schemas.microsoft.com/office/drawing/2014/main" id="{8B878DB6-5BE6-18B6-B413-B172ED88741B}"/>
+              </a:ext>
+            </a:extLst>
+          </p:cNvPr>
+          <p:cNvSpPr/>
+          <p:nvPr/>
+        </p:nvSpPr>
+        <p:spPr>
+          <a:xfrm>
+            <a:off x="4010217" y="1500910"/>
+            <a:ext cx="1550073" cy="461818"/>
+          </a:xfrm>
+          <a:prstGeom prst="rect">
+            <a:avLst/>
+          </a:prstGeom>
+        </p:spPr>
+        <p:style>
+          <a:lnRef idx="2">
+            <a:schemeClr val="accent1">
+              <a:shade val="15000"/>
+            </a:schemeClr>
+          </a:lnRef>
+          <a:fillRef idx="1">
+            <a:schemeClr val="accent1"/>
+          </a:fillRef>
+          <a:effectRef idx="0">
+            <a:schemeClr val="accent1"/>
+          </a:effectRef>
+          <a:fontRef idx="minor">
+            <a:schemeClr val="lt1"/>
+          </a:fontRef>
+        </p:style>
+        <p:txBody>
+          <a:bodyPr rtlCol="0" anchor="ctr"/>
+          <a:lstStyle/>
+          <a:p>
+            <a:pPr algn="ctr"/>
+            <a:endParaRPr lang="ko-KR" altLang="en-US"/>
+          </a:p>
+        </p:txBody>
+      </p:sp>
+      <p:pic>
+        <p:nvPicPr>
+          <p:cNvPr id="21" name="그림 20">
+            <a:extLst>
+              <a:ext uri="{FF2B5EF4-FFF2-40B4-BE49-F238E27FC236}">
+                <a16:creationId xmlns:a16="http://schemas.microsoft.com/office/drawing/2014/main" id="{0E80B98B-34F2-9832-78CF-46DE7AFE968C}"/>
+              </a:ext>
+            </a:extLst>
+          </p:cNvPr>
+          <p:cNvPicPr>
+            <a:picLocks noChangeAspect="1"/>
+          </p:cNvPicPr>
+          <p:nvPr/>
+        </p:nvPicPr>
+        <p:blipFill>
+          <a:blip r:embed="rId3">
+            <a:extLst>
+              <a:ext uri="{28A0092B-C50C-407E-A947-70E740481C1C}">
+                <a14:useLocalDpi xmlns:a14="http://schemas.microsoft.com/office/drawing/2010/main" val="0"/>
+              </a:ext>
+            </a:extLst>
+          </a:blip>
+          <a:srcRect t="24559" b="22945"/>
+          <a:stretch>
+            <a:fillRect/>
+          </a:stretch>
+        </p:blipFill>
+        <p:spPr>
+          <a:xfrm rot="10800000">
+            <a:off x="2018443" y="4670590"/>
+            <a:ext cx="2243741" cy="1139081"/>
+          </a:xfrm>
+          <a:prstGeom prst="rect">
+            <a:avLst/>
+          </a:prstGeom>
+        </p:spPr>
+      </p:pic>
+      <p:graphicFrame>
+        <p:nvGraphicFramePr>
+          <p:cNvPr id="22" name="표 21">
+            <a:extLst>
+              <a:ext uri="{FF2B5EF4-FFF2-40B4-BE49-F238E27FC236}">
+                <a16:creationId xmlns:a16="http://schemas.microsoft.com/office/drawing/2014/main" id="{FAF095E9-609B-22B7-BB52-1F0C0FBEE522}"/>
+              </a:ext>
+            </a:extLst>
+          </p:cNvPr>
+          <p:cNvGraphicFramePr>
+            <a:graphicFrameLocks noGrp="1"/>
+          </p:cNvGraphicFramePr>
+          <p:nvPr>
+            <p:extLst>
+              <p:ext uri="{D42A27DB-BD31-4B8C-83A1-F6EECF244321}">
+                <p14:modId xmlns:p14="http://schemas.microsoft.com/office/powerpoint/2010/main" val="3375113938"/>
+              </p:ext>
+            </p:extLst>
+          </p:nvPr>
+        </p:nvGraphicFramePr>
+        <p:xfrm>
+          <a:off x="5057144" y="3889432"/>
+          <a:ext cx="4342360" cy="2103120"/>
+        </p:xfrm>
+        <a:graphic>
+          <a:graphicData uri="http://schemas.openxmlformats.org/drawingml/2006/table">
+            <a:tbl>
+              <a:tblPr firstRow="1" bandRow="1">
+                <a:tableStyleId>{5940675A-B579-460E-94D1-54222C63F5DA}</a:tableStyleId>
+              </a:tblPr>
+              <a:tblGrid>
+                <a:gridCol w="1884294">
+                  <a:extLst>
+                    <a:ext uri="{9D8B030D-6E8A-4147-A177-3AD203B41FA5}">
+                      <a16:colId xmlns:a16="http://schemas.microsoft.com/office/drawing/2014/main" val="3234171030"/>
+                    </a:ext>
+                  </a:extLst>
+                </a:gridCol>
+                <a:gridCol w="2458066">
+                  <a:extLst>
+                    <a:ext uri="{9D8B030D-6E8A-4147-A177-3AD203B41FA5}">
+                      <a16:colId xmlns:a16="http://schemas.microsoft.com/office/drawing/2014/main" val="356375298"/>
+                    </a:ext>
+                  </a:extLst>
+                </a:gridCol>
+              </a:tblGrid>
+              <a:tr h="300714">
+                <a:tc>
+                  <a:txBody>
+                    <a:bodyPr/>
+                    <a:lstStyle/>
+                    <a:p>
+                      <a:pPr algn="ctr" latinLnBrk="1"/>
+                      <a:r>
+                        <a:rPr lang="ko-KR" altLang="en-US" dirty="0"/>
+                        <a:t>조건</a:t>
+                      </a:r>
+                    </a:p>
+                  </a:txBody>
+                  <a:tcPr anchor="ctr">
+                    <a:solidFill>
+                      <a:schemeClr val="bg1"/>
+                    </a:solidFill>
+                  </a:tcPr>
+                </a:tc>
+                <a:tc>
+                  <a:txBody>
+                    <a:bodyPr/>
+                    <a:lstStyle/>
+                    <a:p>
+                      <a:pPr algn="ctr" latinLnBrk="1"/>
+                      <a:r>
+                        <a:rPr lang="ko-KR" altLang="en-US" dirty="0"/>
+                        <a:t>동작</a:t>
+                      </a:r>
+                    </a:p>
+                  </a:txBody>
+                  <a:tcPr anchor="ctr">
+                    <a:solidFill>
+                      <a:schemeClr val="bg1"/>
+                    </a:solidFill>
+                  </a:tcPr>
+                </a:tc>
+                <a:extLst>
+                  <a:ext uri="{0D108BD9-81ED-4DB2-BD59-A6C34878D82A}">
+                    <a16:rowId xmlns:a16="http://schemas.microsoft.com/office/drawing/2014/main" val="454934788"/>
+                  </a:ext>
+                </a:extLst>
+              </a:tr>
+              <a:tr h="304325">
+                <a:tc rowSpan="4">
+                  <a:txBody>
+                    <a:bodyPr/>
+                    <a:lstStyle/>
+                    <a:p>
+                      <a:pPr algn="ctr" latinLnBrk="1"/>
+                      <a:r>
+                        <a:rPr lang="ko-KR" altLang="en-US" dirty="0"/>
+                        <a:t>랜덤</a:t>
+                      </a:r>
+                    </a:p>
+                  </a:txBody>
+                  <a:tcPr anchor="ctr">
+                    <a:solidFill>
+                      <a:schemeClr val="bg1"/>
+                    </a:solidFill>
+                  </a:tcPr>
+                </a:tc>
+                <a:tc>
+                  <a:txBody>
+                    <a:bodyPr/>
+                    <a:lstStyle/>
+                    <a:p>
+                      <a:pPr algn="ctr" latinLnBrk="1"/>
+                      <a:r>
+                        <a:rPr lang="ko-KR" altLang="en-US" dirty="0"/>
+                        <a:t>미사일 공격</a:t>
+                      </a:r>
+                    </a:p>
+                  </a:txBody>
+                  <a:tcPr anchor="ctr">
+                    <a:solidFill>
+                      <a:schemeClr val="bg1"/>
+                    </a:solidFill>
+                  </a:tcPr>
+                </a:tc>
+                <a:extLst>
+                  <a:ext uri="{0D108BD9-81ED-4DB2-BD59-A6C34878D82A}">
+                    <a16:rowId xmlns:a16="http://schemas.microsoft.com/office/drawing/2014/main" val="2267034679"/>
+                  </a:ext>
+                </a:extLst>
+              </a:tr>
+              <a:tr h="359122">
+                <a:tc vMerge="1">
+                  <a:txBody>
+                    <a:bodyPr/>
+                    <a:lstStyle/>
+                    <a:p>
+                      <a:pPr algn="ctr" latinLnBrk="1"/>
+                      <a:endParaRPr lang="ko-KR" altLang="en-US" dirty="0"/>
+                    </a:p>
+                  </a:txBody>
+                  <a:tcPr anchor="ctr">
+                    <a:solidFill>
+                      <a:schemeClr val="bg1"/>
+                    </a:solidFill>
+                  </a:tcPr>
+                </a:tc>
+                <a:tc>
+                  <a:txBody>
+                    <a:bodyPr/>
+                    <a:lstStyle/>
+                    <a:p>
+                      <a:pPr algn="ctr" latinLnBrk="1"/>
+                      <a:r>
+                        <a:rPr lang="ko-KR" altLang="en-US" dirty="0"/>
+                        <a:t>속도는 </a:t>
+                      </a:r>
+                      <a:r>
+                        <a:rPr lang="en-US" altLang="ko-KR" dirty="0"/>
+                        <a:t>3</a:t>
+                      </a:r>
+                      <a:endParaRPr lang="ko-KR" altLang="en-US" dirty="0"/>
+                    </a:p>
+                  </a:txBody>
+                  <a:tcPr anchor="ctr">
+                    <a:solidFill>
+                      <a:schemeClr val="bg1"/>
+                    </a:solidFill>
+                  </a:tcPr>
+                </a:tc>
+                <a:extLst>
+                  <a:ext uri="{0D108BD9-81ED-4DB2-BD59-A6C34878D82A}">
+                    <a16:rowId xmlns:a16="http://schemas.microsoft.com/office/drawing/2014/main" val="1045227227"/>
+                  </a:ext>
+                </a:extLst>
+              </a:tr>
+              <a:tr h="320040">
+                <a:tc vMerge="1">
+                  <a:txBody>
+                    <a:bodyPr/>
+                    <a:lstStyle/>
+                    <a:p>
+                      <a:pPr algn="ctr" latinLnBrk="1"/>
+                      <a:endParaRPr lang="ko-KR" altLang="en-US" dirty="0"/>
+                    </a:p>
+                  </a:txBody>
+                  <a:tcPr anchor="ctr">
+                    <a:solidFill>
+                      <a:schemeClr val="bg1"/>
+                    </a:solidFill>
+                  </a:tcPr>
+                </a:tc>
+                <a:tc>
+                  <a:txBody>
+                    <a:bodyPr/>
+                    <a:lstStyle/>
+                    <a:p>
+                      <a:pPr algn="ctr" latinLnBrk="1"/>
+                      <a:r>
+                        <a:rPr lang="ko-KR" altLang="en-US" dirty="0"/>
+                        <a:t>폭파 애니메이션은 미사일</a:t>
+                      </a:r>
+                      <a:r>
+                        <a:rPr lang="en-US" altLang="ko-KR" dirty="0"/>
+                        <a:t>16.prefab</a:t>
+                      </a:r>
+                      <a:endParaRPr lang="ko-KR" altLang="en-US" dirty="0"/>
+                    </a:p>
+                  </a:txBody>
+                  <a:tcPr anchor="ctr">
+                    <a:solidFill>
+                      <a:schemeClr val="bg1"/>
+                    </a:solidFill>
+                  </a:tcPr>
+                </a:tc>
+                <a:extLst>
+                  <a:ext uri="{0D108BD9-81ED-4DB2-BD59-A6C34878D82A}">
+                    <a16:rowId xmlns:a16="http://schemas.microsoft.com/office/drawing/2014/main" val="1235667259"/>
+                  </a:ext>
+                </a:extLst>
+              </a:tr>
+              <a:tr h="320040">
+                <a:tc vMerge="1">
+                  <a:txBody>
+                    <a:bodyPr/>
+                    <a:lstStyle/>
+                    <a:p>
+                      <a:pPr latinLnBrk="1"/>
+                      <a:endParaRPr lang="ko-KR" altLang="en-US"/>
+                    </a:p>
+                  </a:txBody>
+                  <a:tcPr/>
+                </a:tc>
+                <a:tc>
+                  <a:txBody>
+                    <a:bodyPr/>
+                    <a:lstStyle/>
+                    <a:p>
+                      <a:pPr algn="ctr" latinLnBrk="1"/>
+                      <a:r>
+                        <a:rPr lang="ko-KR" altLang="en-US" dirty="0"/>
+                        <a:t>최대 </a:t>
+                      </a:r>
+                      <a:r>
+                        <a:rPr lang="en-US" altLang="ko-KR"/>
+                        <a:t>7~10</a:t>
+                      </a:r>
+                      <a:r>
+                        <a:rPr lang="ko-KR" altLang="en-US"/>
+                        <a:t>개생성</a:t>
+                      </a:r>
+                      <a:endParaRPr lang="ko-KR" altLang="en-US" dirty="0"/>
+                    </a:p>
+                  </a:txBody>
+                  <a:tcPr anchor="ctr">
+                    <a:solidFill>
+                      <a:schemeClr val="bg1"/>
+                    </a:solidFill>
+                  </a:tcPr>
+                </a:tc>
+                <a:extLst>
+                  <a:ext uri="{0D108BD9-81ED-4DB2-BD59-A6C34878D82A}">
+                    <a16:rowId xmlns:a16="http://schemas.microsoft.com/office/drawing/2014/main" val="1818744946"/>
+                  </a:ext>
+                </a:extLst>
+              </a:tr>
+            </a:tbl>
+          </a:graphicData>
+        </a:graphic>
+      </p:graphicFrame>
+      <p:pic>
+        <p:nvPicPr>
+          <p:cNvPr id="2" name="그림 1">
+            <a:extLst>
+              <a:ext uri="{FF2B5EF4-FFF2-40B4-BE49-F238E27FC236}">
+                <a16:creationId xmlns:a16="http://schemas.microsoft.com/office/drawing/2014/main" id="{9027B2F3-6E0B-D780-1708-D464B8FE50A5}"/>
+              </a:ext>
+            </a:extLst>
+          </p:cNvPr>
+          <p:cNvPicPr>
+            <a:picLocks noChangeAspect="1"/>
+          </p:cNvPicPr>
+          <p:nvPr/>
+        </p:nvPicPr>
+        <p:blipFill>
+          <a:blip r:embed="rId3">
+            <a:extLst>
+              <a:ext uri="{28A0092B-C50C-407E-A947-70E740481C1C}">
+                <a14:useLocalDpi xmlns:a14="http://schemas.microsoft.com/office/drawing/2010/main" val="0"/>
+              </a:ext>
+            </a:extLst>
+          </a:blip>
+          <a:srcRect t="24559" b="22945"/>
+          <a:stretch>
+            <a:fillRect/>
+          </a:stretch>
+        </p:blipFill>
+        <p:spPr>
+          <a:xfrm rot="10800000">
+            <a:off x="5136032" y="2760169"/>
+            <a:ext cx="2243741" cy="1139081"/>
+          </a:xfrm>
+          <a:prstGeom prst="rect">
+            <a:avLst/>
+          </a:prstGeom>
+        </p:spPr>
+      </p:pic>
+      <p:pic>
+        <p:nvPicPr>
+          <p:cNvPr id="4" name="그림 3">
+            <a:extLst>
+              <a:ext uri="{FF2B5EF4-FFF2-40B4-BE49-F238E27FC236}">
+                <a16:creationId xmlns:a16="http://schemas.microsoft.com/office/drawing/2014/main" id="{2870FE24-38C0-66D6-60BB-A1F208DD5BEF}"/>
+              </a:ext>
+            </a:extLst>
+          </p:cNvPr>
+          <p:cNvPicPr>
+            <a:picLocks noChangeAspect="1"/>
+          </p:cNvPicPr>
+          <p:nvPr/>
+        </p:nvPicPr>
+        <p:blipFill>
+          <a:blip r:embed="rId3">
+            <a:extLst>
+              <a:ext uri="{28A0092B-C50C-407E-A947-70E740481C1C}">
+                <a14:useLocalDpi xmlns:a14="http://schemas.microsoft.com/office/drawing/2010/main" val="0"/>
+              </a:ext>
+            </a:extLst>
+          </a:blip>
+          <a:srcRect t="24559" b="22945"/>
+          <a:stretch>
+            <a:fillRect/>
+          </a:stretch>
+        </p:blipFill>
+        <p:spPr>
+          <a:xfrm rot="10800000">
+            <a:off x="3852259" y="1554929"/>
+            <a:ext cx="2243741" cy="1139081"/>
+          </a:xfrm>
+          <a:prstGeom prst="rect">
+            <a:avLst/>
+          </a:prstGeom>
+        </p:spPr>
+      </p:pic>
+      <p:pic>
+        <p:nvPicPr>
+          <p:cNvPr id="5" name="그림 4">
+            <a:extLst>
+              <a:ext uri="{FF2B5EF4-FFF2-40B4-BE49-F238E27FC236}">
+                <a16:creationId xmlns:a16="http://schemas.microsoft.com/office/drawing/2014/main" id="{C684AC95-4518-AB13-E3AD-A9338543EC4E}"/>
+              </a:ext>
+            </a:extLst>
+          </p:cNvPr>
+          <p:cNvPicPr>
+            <a:picLocks noChangeAspect="1"/>
+          </p:cNvPicPr>
+          <p:nvPr/>
+        </p:nvPicPr>
+        <p:blipFill>
+          <a:blip r:embed="rId3">
+            <a:extLst>
+              <a:ext uri="{28A0092B-C50C-407E-A947-70E740481C1C}">
+                <a14:useLocalDpi xmlns:a14="http://schemas.microsoft.com/office/drawing/2010/main" val="0"/>
+              </a:ext>
+            </a:extLst>
+          </a:blip>
+          <a:srcRect t="24559" b="22945"/>
+          <a:stretch>
+            <a:fillRect/>
+          </a:stretch>
+        </p:blipFill>
+        <p:spPr>
+          <a:xfrm rot="10800000">
+            <a:off x="5850221" y="680589"/>
+            <a:ext cx="2243741" cy="1139081"/>
+          </a:xfrm>
+          <a:prstGeom prst="rect">
+            <a:avLst/>
+          </a:prstGeom>
+        </p:spPr>
+      </p:pic>
+    </p:spTree>
+    <p:extLst>
+      <p:ext uri="{BB962C8B-B14F-4D97-AF65-F5344CB8AC3E}">
+        <p14:creationId xmlns:p14="http://schemas.microsoft.com/office/powerpoint/2010/main" val="1501683699"/>
+      </p:ext>
+    </p:extLst>
+  </p:cSld>
+  <p:clrMapOvr>
+    <a:masterClrMapping/>
+  </p:clrMapOvr>
+</p:sld>
+</file>
+
+<file path=ppt/slides/slide8.xml><?xml version="1.0" encoding="utf-8"?>
 <p:sld xmlns:a="http://schemas.openxmlformats.org/drawingml/2006/main" xmlns:r="http://schemas.openxmlformats.org/officeDocument/2006/relationships" xmlns:p="http://schemas.openxmlformats.org/presentationml/2006/main">
   <p:cSld>
     <p:spTree>
@@ -6115,7 +8588,7 @@
 </p:sld>
 </file>
 
-<file path=ppt/slides/slide6.xml><?xml version="1.0" encoding="utf-8"?>
+<file path=ppt/slides/slide9.xml><?xml version="1.0" encoding="utf-8"?>
 <p:sld xmlns:a="http://schemas.openxmlformats.org/drawingml/2006/main" xmlns:r="http://schemas.openxmlformats.org/officeDocument/2006/relationships" xmlns:p="http://schemas.openxmlformats.org/presentationml/2006/main">
   <p:cSld>
     <p:spTree>
@@ -6142,42 +8615,6 @@
     <p:extLst>
       <p:ext uri="{BB962C8B-B14F-4D97-AF65-F5344CB8AC3E}">
         <p14:creationId xmlns:p14="http://schemas.microsoft.com/office/powerpoint/2010/main" val="1610483579"/>
-      </p:ext>
-    </p:extLst>
-  </p:cSld>
-  <p:clrMapOvr>
-    <a:masterClrMapping/>
-  </p:clrMapOvr>
-</p:sld>
-</file>
-
-<file path=ppt/slides/slide7.xml><?xml version="1.0" encoding="utf-8"?>
-<p:sld xmlns:a="http://schemas.openxmlformats.org/drawingml/2006/main" xmlns:r="http://schemas.openxmlformats.org/officeDocument/2006/relationships" xmlns:p="http://schemas.openxmlformats.org/presentationml/2006/main">
-  <p:cSld>
-    <p:spTree>
-      <p:nvGrpSpPr>
-        <p:cNvPr id="1" name="">
-          <a:extLst>
-            <a:ext uri="{FF2B5EF4-FFF2-40B4-BE49-F238E27FC236}">
-              <a16:creationId xmlns:a16="http://schemas.microsoft.com/office/drawing/2014/main" id="{7B27190B-74E5-2EE0-3313-ADB70782C69C}"/>
-            </a:ext>
-          </a:extLst>
-        </p:cNvPr>
-        <p:cNvGrpSpPr/>
-        <p:nvPr/>
-      </p:nvGrpSpPr>
-      <p:grpSpPr>
-        <a:xfrm>
-          <a:off x="0" y="0"/>
-          <a:ext cx="0" cy="0"/>
-          <a:chOff x="0" y="0"/>
-          <a:chExt cx="0" cy="0"/>
-        </a:xfrm>
-      </p:grpSpPr>
-    </p:spTree>
-    <p:extLst>
-      <p:ext uri="{BB962C8B-B14F-4D97-AF65-F5344CB8AC3E}">
-        <p14:creationId xmlns:p14="http://schemas.microsoft.com/office/powerpoint/2010/main" val="291063068"/>
       </p:ext>
     </p:extLst>
   </p:cSld>
